--- a/report/家庭記帳_期末報告.pptx
+++ b/report/家庭記帳_期末報告.pptx
@@ -126,14 +126,14 @@
   <p:extLst>
     <p:ext uri="{521415D9-36F7-43E2-AB2F-B90AF26B5E84}">
       <p14:sectionLst xmlns:p14="http://schemas.microsoft.com/office/powerpoint/2010/main">
-        <p14:section name="開場" id="{00dec8b0-59d7-35bc-397c-82dacc33d4fb}">
+        <p14:section name="開場" id="{22902e6b-10fd-0028-907b-ff0e5fc7b975}">
           <p14:sldIdLst>
             <p14:sldId id="256"/>
             <p14:sldId id="257"/>
             <p14:sldId id="258"/>
           </p14:sldIdLst>
         </p14:section>
-        <p14:section name="系統" id="{abbe91d8-bc00-00b3-4790-857f18bb9d85}">
+        <p14:section name="系統" id="{56296b57-1831-15e8-abcc-93c62859b0e3}">
           <p14:sldIdLst>
             <p14:sldId id="259"/>
             <p14:sldId id="260"/>
@@ -142,7 +142,7 @@
             <p14:sldId id="263"/>
           </p14:sldIdLst>
         </p14:section>
-        <p14:section name="AI 功能" id="{35ae9f03-b7c3-f9fd-4a74-7198fe59a7ce}">
+        <p14:section name="AI 功能" id="{15ee1329-a4a4-518c-dbe4-3417a071094d}">
           <p14:sldIdLst>
             <p14:sldId id="264"/>
             <p14:sldId id="265"/>
@@ -151,7 +151,7 @@
             <p14:sldId id="268"/>
           </p14:sldIdLst>
         </p14:section>
-        <p14:section name="評測與測試" id="{a1a89cbc-e6a9-cfee-a10e-6e1cd4dbe6ea}">
+        <p14:section name="評測與測試" id="{d78a313a-0224-57a4-cc9b-369a26c664f3}">
           <p14:sldIdLst>
             <p14:sldId id="269"/>
             <p14:sldId id="270"/>
@@ -160,7 +160,7 @@
             <p14:sldId id="273"/>
           </p14:sldIdLst>
         </p14:section>
-        <p14:section name="結語" id="{10c0b504-cfc4-262f-8654-57908b5ee3de}">
+        <p14:section name="結語" id="{213b8ec2-f8e4-689e-5c9d-5c32ab148627}">
           <p14:sldIdLst>
             <p14:sldId id="274"/>
             <p14:sldId id="275"/>
@@ -623,6 +623,107 @@
             </c:numRef>
           </c:val>
         </c:ser>
+        <c:ser>
+          <c:idx val="1"/>
+          <c:order val="1"/>
+          <c:tx>
+            <c:strRef>
+              <c:f>Sheet1!$C$1</c:f>
+              <c:strCache>
+                <c:ptCount val="1"/>
+                <c:pt idx="0">
+                  <c:v>deepseek-r1:1.5b</c:v>
+                </c:pt>
+              </c:strCache>
+            </c:strRef>
+          </c:tx>
+          <c:spPr>
+            <a:solidFill>
+              <a:srgbClr val="1F5FBF"/>
+            </a:solidFill>
+            <a:effectLst/>
+          </c:spPr>
+          <c:invertIfNegative val="0"/>
+          <c:dLbls>
+            <c:numFmt formatCode="0.0" sourceLinked="0"/>
+            <c:txPr>
+              <a:bodyPr/>
+              <a:lstStyle/>
+              <a:p>
+                <a:pPr>
+                  <a:defRPr b="0" i="0" strike="noStrike" sz="1100" u="none">
+                    <a:solidFill>
+                      <a:srgbClr val="16233F"/>
+                    </a:solidFill>
+                    <a:latin typeface="+mn-lt"/>
+                  </a:defRPr>
+                </a:pPr>
+              </a:p>
+            </c:txPr>
+            <c:showLegendKey val="0"/>
+            <c:showVal val="1"/>
+            <c:showCatName val="0"/>
+            <c:showSerName val="0"/>
+            <c:showPercent val="0"/>
+            <c:showBubbleSize val="0"/>
+            <c:showLeaderLines val="0"/>
+          </c:dLbls>
+          <c:cat>
+            <c:multiLvlStrRef>
+              <c:f>Sheet1!$A$2:$A$7</c:f>
+              <c:multiLvlStrCache>
+                <c:ptCount val="6"/>
+                <c:lvl>
+                  <c:pt idx="0">
+                    <c:v>切分</c:v>
+                  </c:pt>
+                  <c:pt idx="1">
+                    <c:v>整題完全正確</c:v>
+                  </c:pt>
+                  <c:pt idx="2">
+                    <c:v>日期</c:v>
+                  </c:pt>
+                  <c:pt idx="3">
+                    <c:v>金額</c:v>
+                  </c:pt>
+                  <c:pt idx="4">
+                    <c:v>分類</c:v>
+                  </c:pt>
+                  <c:pt idx="5">
+                    <c:v>分類 Macro-F1</c:v>
+                  </c:pt>
+                </c:lvl>
+              </c:multiLvlStrCache>
+            </c:multiLvlStrRef>
+          </c:cat>
+          <c:val>
+            <c:numRef>
+              <c:f>Sheet1!$C$2:$C$7</c:f>
+              <c:numCache>
+                <c:formatCode>General</c:formatCode>
+                <c:ptCount val="6"/>
+                <c:pt idx="0">
+                  <c:v>84.2</c:v>
+                </c:pt>
+                <c:pt idx="1">
+                  <c:v>6.9</c:v>
+                </c:pt>
+                <c:pt idx="2">
+                  <c:v>84</c:v>
+                </c:pt>
+                <c:pt idx="3">
+                  <c:v>73.6</c:v>
+                </c:pt>
+                <c:pt idx="4">
+                  <c:v>24.8</c:v>
+                </c:pt>
+                <c:pt idx="5">
+                  <c:v>12.9</c:v>
+                </c:pt>
+              </c:numCache>
+            </c:numRef>
+          </c:val>
+        </c:ser>
         <c:dLbls>
           <c:numFmt formatCode="0.0" sourceLinked="0"/>
           <c:txPr>
@@ -754,6 +855,26 @@
         <a:effectLst/>
       </c:spPr>
     </c:plotArea>
+    <c:legend>
+      <c:legendPos val="t"/>
+      <c:overlay val="0"/>
+      <c:txPr>
+        <a:bodyPr/>
+        <a:lstStyle/>
+        <a:p>
+          <a:pPr>
+            <a:defRPr sz="1200">
+              <a:solidFill>
+                <a:srgbClr val="16233F"/>
+              </a:solidFill>
+              <a:latin typeface="+mn-lt"/>
+              <a:cs typeface="+mn-lt"/>
+            </a:defRPr>
+          </a:pPr>
+          <a:endParaRPr lang="en-US"/>
+        </a:p>
+      </c:txPr>
+    </c:legend>
     <c:plotVisOnly val="1"/>
     <c:dispBlanksAs val="span"/>
   </c:chart>
@@ -1693,7 +1814,7 @@
           <a:p>
             <a:r>
               <a:rPr lang="en-US" dirty="0"/>
-              <a:t>這是評測結果。前端規則的整題完全正確率是 63.4%。模型的成績在填好模型設定後跑同一支評測腳本就會補上。</a:t>
+              <a:t>這是評測結果。前端規則的整題完全正確率是 63.4%。我們在本機用 Ollama 跑了 deepseek-r1:1.5b，整題完全正確率只有 6.9%，分類幾乎是亂挑，每一句還要等二三十秒。結論是小模型零樣本做不到，這正是為什麼上線用商業 API、並規劃微調。</a:t>
             </a:r>
             <a:endParaRPr lang="en-US" dirty="0"/>
           </a:p>
@@ -1781,7 +1902,7 @@
           <a:p>
             <a:r>
               <a:rPr lang="en-US" dirty="0"/>
-              <a:t>這幾題是規則錯的例子，每一種錯誤類型挑一題。</a:t>
+              <a:t>這幾題是deepseek-r1:1.5b錯的例子，每一種錯誤類型挑一題。</a:t>
             </a:r>
             <a:endParaRPr lang="en-US" dirty="0"/>
           </a:p>
@@ -5872,7 +5993,43 @@
       </p:pic>
       <p:sp>
         <p:nvSpPr>
-          <p:cNvPr id="5" name="parse-c0-circle"/>
+          <p:cNvPr id="5" name="Text 2"/>
+          <p:cNvSpPr txBox="1"/>
+          <p:nvPr/>
+        </p:nvSpPr>
+        <p:spPr>
+          <a:xfrm>
+            <a:off x="640080" y="6053328"/>
+            <a:ext cx="7223760" cy="274320"/>
+          </a:xfrm>
+          <a:prstGeom prst="rect">
+            <a:avLst/>
+          </a:prstGeom>
+          <a:noFill/>
+          <a:ln/>
+        </p:spPr>
+        <p:txBody>
+          <a:bodyPr wrap="square" lIns="0" tIns="0" rIns="0" bIns="0" rtlCol="0" anchor="t"/>
+          <a:lstStyle/>
+          <a:p>
+            <a:pPr indent="0" marL="0">
+              <a:buNone/>
+            </a:pPr>
+            <a:r>
+              <a:rPr lang="en-US" sz="1100" dirty="0">
+                <a:solidFill>
+                  <a:schemeClr val="accent5"/>
+                </a:solidFill>
+              </a:rPr>
+              <a:t>截圖：本機沒接模型時，前端用規則解析的結果（標紅、標黃的方式跟接模型時一樣）</a:t>
+            </a:r>
+            <a:endParaRPr lang="en-US" sz="1100" dirty="0"/>
+          </a:p>
+        </p:txBody>
+      </p:sp>
+      <p:sp>
+        <p:nvSpPr>
+          <p:cNvPr id="6" name="parse-c0-circle"/>
           <p:cNvSpPr/>
           <p:nvPr/>
         </p:nvSpPr>
@@ -5897,7 +6054,7 @@
       </p:sp>
       <p:pic>
         <p:nvPicPr>
-          <p:cNvPr id="6" name="parse-c0-icon" descr="preencoded.png">    </p:cNvPr>
+          <p:cNvPr id="7" name="parse-c0-icon" descr="preencoded.png">    </p:cNvPr>
           <p:cNvPicPr>
             <a:picLocks noChangeAspect="1"/>
           </p:cNvPicPr>
@@ -5921,7 +6078,7 @@
       </p:pic>
       <p:sp>
         <p:nvSpPr>
-          <p:cNvPr id="7" name="Text 3"/>
+          <p:cNvPr id="8" name="Text 4"/>
           <p:cNvSpPr txBox="1"/>
           <p:nvPr/>
         </p:nvSpPr>
@@ -5957,7 +6114,7 @@
       </p:sp>
       <p:sp>
         <p:nvSpPr>
-          <p:cNvPr id="8" name="Text 4"/>
+          <p:cNvPr id="9" name="Text 5"/>
           <p:cNvSpPr txBox="1"/>
           <p:nvPr/>
         </p:nvSpPr>
@@ -5993,7 +6150,7 @@
       </p:sp>
       <p:sp>
         <p:nvSpPr>
-          <p:cNvPr id="9" name="parse-c1-circle"/>
+          <p:cNvPr id="10" name="parse-c1-circle"/>
           <p:cNvSpPr/>
           <p:nvPr/>
         </p:nvSpPr>
@@ -6018,7 +6175,7 @@
       </p:sp>
       <p:pic>
         <p:nvPicPr>
-          <p:cNvPr id="10" name="parse-c1-icon" descr="preencoded.png">    </p:cNvPr>
+          <p:cNvPr id="11" name="parse-c1-icon" descr="preencoded.png">    </p:cNvPr>
           <p:cNvPicPr>
             <a:picLocks noChangeAspect="1"/>
           </p:cNvPicPr>
@@ -6042,7 +6199,7 @@
       </p:pic>
       <p:sp>
         <p:nvSpPr>
-          <p:cNvPr id="11" name="Text 6"/>
+          <p:cNvPr id="12" name="Text 7"/>
           <p:cNvSpPr txBox="1"/>
           <p:nvPr/>
         </p:nvSpPr>
@@ -6078,7 +6235,7 @@
       </p:sp>
       <p:sp>
         <p:nvSpPr>
-          <p:cNvPr id="12" name="Text 7"/>
+          <p:cNvPr id="13" name="Text 8"/>
           <p:cNvSpPr txBox="1"/>
           <p:nvPr/>
         </p:nvSpPr>
@@ -6114,7 +6271,7 @@
       </p:sp>
       <p:sp>
         <p:nvSpPr>
-          <p:cNvPr id="13" name="parse-c2-circle"/>
+          <p:cNvPr id="14" name="parse-c2-circle"/>
           <p:cNvSpPr/>
           <p:nvPr/>
         </p:nvSpPr>
@@ -6139,7 +6296,7 @@
       </p:sp>
       <p:pic>
         <p:nvPicPr>
-          <p:cNvPr id="14" name="parse-c2-icon" descr="preencoded.png">    </p:cNvPr>
+          <p:cNvPr id="15" name="parse-c2-icon" descr="preencoded.png">    </p:cNvPr>
           <p:cNvPicPr>
             <a:picLocks noChangeAspect="1"/>
           </p:cNvPicPr>
@@ -6163,7 +6320,7 @@
       </p:pic>
       <p:sp>
         <p:nvSpPr>
-          <p:cNvPr id="15" name="Text 9"/>
+          <p:cNvPr id="16" name="Text 10"/>
           <p:cNvSpPr txBox="1"/>
           <p:nvPr/>
         </p:nvSpPr>
@@ -6199,7 +6356,7 @@
       </p:sp>
       <p:sp>
         <p:nvSpPr>
-          <p:cNvPr id="16" name="Text 10"/>
+          <p:cNvPr id="17" name="Text 11"/>
           <p:cNvSpPr txBox="1"/>
           <p:nvPr/>
         </p:nvSpPr>
@@ -6235,7 +6392,7 @@
       </p:sp>
       <p:sp>
         <p:nvSpPr>
-          <p:cNvPr id="17" name="parse-c3-circle"/>
+          <p:cNvPr id="18" name="parse-c3-circle"/>
           <p:cNvSpPr/>
           <p:nvPr/>
         </p:nvSpPr>
@@ -6260,7 +6417,7 @@
       </p:sp>
       <p:pic>
         <p:nvPicPr>
-          <p:cNvPr id="18" name="parse-c3-icon" descr="preencoded.png">    </p:cNvPr>
+          <p:cNvPr id="19" name="parse-c3-icon" descr="preencoded.png">    </p:cNvPr>
           <p:cNvPicPr>
             <a:picLocks noChangeAspect="1"/>
           </p:cNvPicPr>
@@ -6284,7 +6441,7 @@
       </p:pic>
       <p:sp>
         <p:nvSpPr>
-          <p:cNvPr id="19" name="Text 12"/>
+          <p:cNvPr id="20" name="Text 13"/>
           <p:cNvSpPr txBox="1"/>
           <p:nvPr/>
         </p:nvSpPr>
@@ -6320,7 +6477,7 @@
       </p:sp>
       <p:sp>
         <p:nvSpPr>
-          <p:cNvPr id="20" name="Text 13"/>
+          <p:cNvPr id="21" name="Text 14"/>
           <p:cNvSpPr txBox="1"/>
           <p:nvPr/>
         </p:nvSpPr>
@@ -8560,7 +8717,7 @@
                   <a:schemeClr val="tx2"/>
                 </a:solidFill>
               </a:rPr>
-              <a:t>評測結果：前端規則的基準線</a:t>
+              <a:t>評測結果：模型 vs 前端規則</a:t>
             </a:r>
             <a:endParaRPr lang="en-US" sz="3200" dirty="0"/>
           </a:p>
@@ -8584,7 +8741,7 @@
       </p:graphicFrame>
       <p:sp>
         <p:nvSpPr>
-          <p:cNvPr id="4" name="eval-pending"/>
+          <p:cNvPr id="4" name="eval-side"/>
           <p:cNvSpPr/>
           <p:nvPr/>
         </p:nvSpPr>
@@ -8611,63 +8768,14 @@
       </p:sp>
       <p:sp>
         <p:nvSpPr>
-          <p:cNvPr id="5" name="eval-pending-ic-circle"/>
-          <p:cNvSpPr/>
-          <p:nvPr/>
-        </p:nvSpPr>
-        <p:spPr>
-          <a:xfrm>
-            <a:off x="8138160" y="1737360"/>
-            <a:ext cx="548640" cy="548640"/>
-          </a:xfrm>
-          <a:prstGeom prst="ellipse">
-            <a:avLst/>
-          </a:prstGeom>
-          <a:solidFill>
-            <a:schemeClr val="accent4"/>
-          </a:solidFill>
-          <a:ln w="12700">
-            <a:solidFill>
-              <a:schemeClr val="accent4"/>
-            </a:solidFill>
-            <a:prstDash val="solid"/>
-          </a:ln>
-        </p:spPr>
-      </p:sp>
-      <p:pic>
-        <p:nvPicPr>
-          <p:cNvPr id="6" name="eval-pending-ic-icon" descr="preencoded.png">    </p:cNvPr>
-          <p:cNvPicPr>
-            <a:picLocks noChangeAspect="1"/>
-          </p:cNvPicPr>
-          <p:nvPr/>
-        </p:nvPicPr>
-        <p:blipFill>
-          <a:blip r:embed="rId2"/>
-          <a:stretch>
-            <a:fillRect/>
-          </a:stretch>
-        </p:blipFill>
-        <p:spPr>
-          <a:xfrm>
-            <a:off x="8280806" y="1880006"/>
-            <a:ext cx="263347" cy="263347"/>
-          </a:xfrm>
-          <a:prstGeom prst="rect">
-            <a:avLst/>
-          </a:prstGeom>
-        </p:spPr>
-      </p:pic>
-      <p:sp>
-        <p:nvSpPr>
-          <p:cNvPr id="7" name="Text 3"/>
+          <p:cNvPr id="5" name="Text 2"/>
           <p:cNvSpPr txBox="1"/>
           <p:nvPr/>
         </p:nvSpPr>
         <p:spPr>
           <a:xfrm>
-            <a:off x="8823960" y="1755648"/>
-            <a:ext cx="2651760" cy="502920"/>
+            <a:off x="8138160" y="1645920"/>
+            <a:ext cx="3291840" cy="411480"/>
           </a:xfrm>
           <a:prstGeom prst="rect">
             <a:avLst/>
@@ -8676,7 +8784,7 @@
           <a:ln/>
         </p:spPr>
         <p:txBody>
-          <a:bodyPr wrap="square" lIns="0" tIns="0" rIns="0" bIns="0" rtlCol="0" anchor="ctr"/>
+          <a:bodyPr wrap="square" lIns="0" tIns="0" rIns="0" bIns="0" rtlCol="0" anchor="t"/>
           <a:lstStyle/>
           <a:p>
             <a:pPr indent="0" marL="0">
@@ -8688,7 +8796,7 @@
                   <a:schemeClr val="tx2"/>
                 </a:solidFill>
               </a:rPr>
-              <a:t>模型的成績待補</a:t>
+              <a:t>數字背後</a:t>
             </a:r>
             <a:endParaRPr lang="en-US" sz="1800" dirty="0"/>
           </a:p>
@@ -8696,14 +8804,14 @@
       </p:sp>
       <p:sp>
         <p:nvSpPr>
-          <p:cNvPr id="8" name="Text 4"/>
+          <p:cNvPr id="6" name="Text 3"/>
           <p:cNvSpPr txBox="1"/>
           <p:nvPr/>
         </p:nvSpPr>
         <p:spPr>
           <a:xfrm>
-            <a:off x="8138160" y="2514600"/>
-            <a:ext cx="3246120" cy="3474720"/>
+            <a:off x="8138160" y="2194560"/>
+            <a:ext cx="3291840" cy="274320"/>
           </a:xfrm>
           <a:prstGeom prst="rect">
             <a:avLst/>
@@ -8721,33 +8829,287 @@
             <a:r>
               <a:rPr lang="en-US" sz="1300" dirty="0">
                 <a:solidFill>
+                  <a:schemeClr val="accent5"/>
+                </a:solidFill>
+              </a:rPr>
+              <a:t>整題完全正確</a:t>
+            </a:r>
+            <a:endParaRPr lang="en-US" sz="1300" dirty="0"/>
+          </a:p>
+        </p:txBody>
+      </p:sp>
+      <p:sp>
+        <p:nvSpPr>
+          <p:cNvPr id="7" name="Text 4"/>
+          <p:cNvSpPr txBox="1"/>
+          <p:nvPr/>
+        </p:nvSpPr>
+        <p:spPr>
+          <a:xfrm>
+            <a:off x="8138160" y="2468880"/>
+            <a:ext cx="3291840" cy="320040"/>
+          </a:xfrm>
+          <a:prstGeom prst="rect">
+            <a:avLst/>
+          </a:prstGeom>
+          <a:noFill/>
+          <a:ln/>
+        </p:spPr>
+        <p:txBody>
+          <a:bodyPr wrap="square" lIns="0" tIns="0" rIns="0" bIns="0" rtlCol="0" anchor="t"/>
+          <a:lstStyle/>
+          <a:p>
+            <a:pPr indent="0" marL="0">
+              <a:buNone/>
+            </a:pPr>
+            <a:r>
+              <a:rPr lang="en-US" sz="1500" b="1" dirty="0">
+                <a:solidFill>
                   <a:schemeClr val="tx1"/>
                 </a:solidFill>
               </a:rPr>
-              <a:t>規則已經能做到整題完全正確 63.4%，但錯在模型最擅長的地方：沒見過的說法、相對日期、口語。</a:t>
+              <a:t>63.4%（規則）vs 6.9%</a:t>
+            </a:r>
+            <a:endParaRPr lang="en-US" sz="1500" dirty="0"/>
+          </a:p>
+        </p:txBody>
+      </p:sp>
+      <p:sp>
+        <p:nvSpPr>
+          <p:cNvPr id="8" name="Text 5"/>
+          <p:cNvSpPr txBox="1"/>
+          <p:nvPr/>
+        </p:nvSpPr>
+        <p:spPr>
+          <a:xfrm>
+            <a:off x="8138160" y="2852928"/>
+            <a:ext cx="3291840" cy="274320"/>
+          </a:xfrm>
+          <a:prstGeom prst="rect">
+            <a:avLst/>
+          </a:prstGeom>
+          <a:noFill/>
+          <a:ln/>
+        </p:spPr>
+        <p:txBody>
+          <a:bodyPr wrap="square" lIns="0" tIns="0" rIns="0" bIns="0" rtlCol="0" anchor="t"/>
+          <a:lstStyle/>
+          <a:p>
+            <a:pPr indent="0" marL="0">
+              <a:buNone/>
+            </a:pPr>
+            <a:r>
+              <a:rPr lang="en-US" sz="1300" dirty="0">
+                <a:solidFill>
+                  <a:schemeClr val="accent5"/>
+                </a:solidFill>
+              </a:rPr>
+              <a:t>分類正確率</a:t>
             </a:r>
             <a:endParaRPr lang="en-US" sz="1300" dirty="0"/>
           </a:p>
+        </p:txBody>
+      </p:sp>
+      <p:sp>
+        <p:nvSpPr>
+          <p:cNvPr id="9" name="Text 6"/>
+          <p:cNvSpPr txBox="1"/>
+          <p:nvPr/>
+        </p:nvSpPr>
+        <p:spPr>
+          <a:xfrm>
+            <a:off x="8138160" y="3127248"/>
+            <a:ext cx="3291840" cy="320040"/>
+          </a:xfrm>
+          <a:prstGeom prst="rect">
+            <a:avLst/>
+          </a:prstGeom>
+          <a:noFill/>
+          <a:ln/>
+        </p:spPr>
+        <p:txBody>
+          <a:bodyPr wrap="square" lIns="0" tIns="0" rIns="0" bIns="0" rtlCol="0" anchor="t"/>
+          <a:lstStyle/>
           <a:p>
             <a:pPr indent="0" marL="0">
               <a:buNone/>
             </a:pPr>
+            <a:r>
+              <a:rPr lang="en-US" sz="1500" b="1" dirty="0">
+                <a:solidFill>
+                  <a:schemeClr val="tx1"/>
+                </a:solidFill>
+              </a:rPr>
+              <a:t>86.4% vs 24.8%</a:t>
+            </a:r>
+            <a:endParaRPr lang="en-US" sz="1500" dirty="0"/>
+          </a:p>
+        </p:txBody>
+      </p:sp>
+      <p:sp>
+        <p:nvSpPr>
+          <p:cNvPr id="10" name="Text 7"/>
+          <p:cNvSpPr txBox="1"/>
+          <p:nvPr/>
+        </p:nvSpPr>
+        <p:spPr>
+          <a:xfrm>
+            <a:off x="8138160" y="3511296"/>
+            <a:ext cx="3291840" cy="274320"/>
+          </a:xfrm>
+          <a:prstGeom prst="rect">
+            <a:avLst/>
+          </a:prstGeom>
+          <a:noFill/>
+          <a:ln/>
+        </p:spPr>
+        <p:txBody>
+          <a:bodyPr wrap="square" lIns="0" tIns="0" rIns="0" bIns="0" rtlCol="0" anchor="t"/>
+          <a:lstStyle/>
+          <a:p>
+            <a:pPr indent="0" marL="0">
+              <a:buNone/>
+            </a:pPr>
+            <a:r>
+              <a:rPr lang="en-US" sz="1300" dirty="0">
+                <a:solidFill>
+                  <a:schemeClr val="accent5"/>
+                </a:solidFill>
+              </a:rPr>
+              <a:t>沒講金額卻填數字</a:t>
+            </a:r>
             <a:endParaRPr lang="en-US" sz="1300" dirty="0"/>
           </a:p>
+        </p:txBody>
+      </p:sp>
+      <p:sp>
+        <p:nvSpPr>
+          <p:cNvPr id="11" name="Text 8"/>
+          <p:cNvSpPr txBox="1"/>
+          <p:nvPr/>
+        </p:nvSpPr>
+        <p:spPr>
+          <a:xfrm>
+            <a:off x="8138160" y="3785616"/>
+            <a:ext cx="3291840" cy="320040"/>
+          </a:xfrm>
+          <a:prstGeom prst="rect">
+            <a:avLst/>
+          </a:prstGeom>
+          <a:noFill/>
+          <a:ln/>
+        </p:spPr>
+        <p:txBody>
+          <a:bodyPr wrap="square" lIns="0" tIns="0" rIns="0" bIns="0" rtlCol="0" anchor="t"/>
+          <a:lstStyle/>
           <a:p>
             <a:pPr indent="0" marL="0">
               <a:buNone/>
             </a:pPr>
             <a:r>
+              <a:rPr lang="en-US" sz="1500" b="1" dirty="0">
+                <a:solidFill>
+                  <a:schemeClr val="tx1"/>
+                </a:solidFill>
+              </a:rPr>
+              <a:t>0.0% vs 50.0%</a:t>
+            </a:r>
+            <a:endParaRPr lang="en-US" sz="1500" dirty="0"/>
+          </a:p>
+        </p:txBody>
+      </p:sp>
+      <p:sp>
+        <p:nvSpPr>
+          <p:cNvPr id="12" name="Text 9"/>
+          <p:cNvSpPr txBox="1"/>
+          <p:nvPr/>
+        </p:nvSpPr>
+        <p:spPr>
+          <a:xfrm>
+            <a:off x="8138160" y="4169664"/>
+            <a:ext cx="3291840" cy="274320"/>
+          </a:xfrm>
+          <a:prstGeom prst="rect">
+            <a:avLst/>
+          </a:prstGeom>
+          <a:noFill/>
+          <a:ln/>
+        </p:spPr>
+        <p:txBody>
+          <a:bodyPr wrap="square" lIns="0" tIns="0" rIns="0" bIns="0" rtlCol="0" anchor="t"/>
+          <a:lstStyle/>
+          <a:p>
+            <a:pPr indent="0" marL="0">
+              <a:buNone/>
+            </a:pPr>
+            <a:r>
               <a:rPr lang="en-US" sz="1300" dirty="0">
                 <a:solidFill>
+                  <a:schemeClr val="accent5"/>
+                </a:solidFill>
+              </a:rPr>
+              <a:t>每句要等</a:t>
+            </a:r>
+            <a:endParaRPr lang="en-US" sz="1300" dirty="0"/>
+          </a:p>
+        </p:txBody>
+      </p:sp>
+      <p:sp>
+        <p:nvSpPr>
+          <p:cNvPr id="13" name="Text 10"/>
+          <p:cNvSpPr txBox="1"/>
+          <p:nvPr/>
+        </p:nvSpPr>
+        <p:spPr>
+          <a:xfrm>
+            <a:off x="8138160" y="4443984"/>
+            <a:ext cx="3291840" cy="320040"/>
+          </a:xfrm>
+          <a:prstGeom prst="rect">
+            <a:avLst/>
+          </a:prstGeom>
+          <a:noFill/>
+          <a:ln/>
+        </p:spPr>
+        <p:txBody>
+          <a:bodyPr wrap="square" lIns="0" tIns="0" rIns="0" bIns="0" rtlCol="0" anchor="t"/>
+          <a:lstStyle/>
+          <a:p>
+            <a:pPr indent="0" marL="0">
+              <a:buNone/>
+            </a:pPr>
+            <a:r>
+              <a:rPr lang="en-US" sz="1500" b="1" dirty="0">
+                <a:solidFill>
                   <a:schemeClr val="tx1"/>
                 </a:solidFill>
               </a:rPr>
-              <a:t>模型那一欄：在 backend/ 跑</a:t>
-            </a:r>
-            <a:endParaRPr lang="en-US" sz="1300" dirty="0"/>
-          </a:p>
+              <a:t>27.27 秒（p50，本機 CPU）</a:t>
+            </a:r>
+            <a:endParaRPr lang="en-US" sz="1500" dirty="0"/>
+          </a:p>
+        </p:txBody>
+      </p:sp>
+      <p:sp>
+        <p:nvSpPr>
+          <p:cNvPr id="14" name="Text 11"/>
+          <p:cNvSpPr txBox="1"/>
+          <p:nvPr/>
+        </p:nvSpPr>
+        <p:spPr>
+          <a:xfrm>
+            <a:off x="8138160" y="4892040"/>
+            <a:ext cx="3291840" cy="1097280"/>
+          </a:xfrm>
+          <a:prstGeom prst="rect">
+            <a:avLst/>
+          </a:prstGeom>
+          <a:noFill/>
+          <a:ln/>
+        </p:spPr>
+        <p:txBody>
+          <a:bodyPr wrap="square" lIns="0" tIns="0" rIns="0" bIns="0" rtlCol="0" anchor="t"/>
+          <a:lstStyle/>
           <a:p>
             <a:pPr indent="0" marL="0">
               <a:buNone/>
@@ -8758,21 +9120,7 @@
                   <a:schemeClr val="tx1"/>
                 </a:solidFill>
               </a:rPr>
-              <a:t>python tools/eval_nlp.py --label &lt;名稱&gt;</a:t>
-            </a:r>
-            <a:endParaRPr lang="en-US" sz="1300" dirty="0"/>
-          </a:p>
-          <a:p>
-            <a:pPr indent="0" marL="0">
-              <a:buNone/>
-            </a:pPr>
-            <a:r>
-              <a:rPr lang="en-US" sz="1300" dirty="0">
-                <a:solidFill>
-                  <a:schemeClr val="tx1"/>
-                </a:solidFill>
-              </a:rPr>
-              <a:t>再跑 report/collect.py 與 build_deck.js，這張圖會自動多一欄。</a:t>
+              <a:t>1.5B 的推理模型零樣本做記帳抽欄位，全面輸給規則；日期差不多，是因為日期本來就由程式依原句重算。上線要用大模型（商業 API）或先微調。</a:t>
             </a:r>
             <a:endParaRPr lang="en-US" sz="1300" dirty="0"/>
           </a:p>
@@ -8880,7 +9228,7 @@
                   <a:schemeClr val="tx2"/>
                 </a:solidFill>
               </a:rPr>
-              <a:t>規則錯在哪：這就是需要模型的原因</a:t>
+              <a:t>錯誤分析：deepseek-r1:1.5b 錯在哪</a:t>
             </a:r>
             <a:endParaRPr lang="en-US" sz="3200" dirty="0"/>
           </a:p>
@@ -9113,7 +9461,7 @@
                             <a:schemeClr val="tx1"/>
                           </a:solidFill>
                         </a:rPr>
-                        <a:t>Uber 回家 270</a:t>
+                        <a:t>早餐55</a:t>
                       </a:r>
                       <a:endParaRPr lang="en-US" sz="1300" dirty="0"/>
                     </a:p>
@@ -9174,7 +9522,7 @@
                             <a:schemeClr val="accent3"/>
                           </a:solidFill>
                         </a:rPr>
-                        <a:t>分類：其他 → 應為 交通</a:t>
+                        <a:t>分類：居住 → 應為 餐飲</a:t>
                       </a:r>
                       <a:endParaRPr lang="en-US" sz="1300" dirty="0"/>
                     </a:p>
@@ -9235,7 +9583,7 @@
                             <a:schemeClr val="accent5"/>
                           </a:solidFill>
                         </a:rPr>
-                        <a:t>沒見過的說法（Uber、Netflix、星巴克）只能猜「其他」</a:t>
+                        <a:t>不會照分類清單挑，常挑到不相干的分類</a:t>
                       </a:r>
                       <a:endParaRPr lang="en-US" sz="1300" dirty="0"/>
                     </a:p>
@@ -9298,7 +9646,7 @@
                             <a:schemeClr val="tx1"/>
                           </a:solidFill>
                         </a:rPr>
-                        <a:t>加油 1,250</a:t>
+                        <a:t>宵夜鹽酥雞150</a:t>
                       </a:r>
                       <a:endParaRPr lang="en-US" sz="1300" dirty="0"/>
                     </a:p>
@@ -9420,7 +9768,7 @@
                             <a:schemeClr val="accent5"/>
                           </a:solidFill>
                         </a:rPr>
-                        <a:t>「1,250」的逗號被當成兩筆的分隔</a:t>
+                        <a:t>把一筆切成兩筆，或把兩筆併成一筆</a:t>
                       </a:r>
                       <a:endParaRPr lang="en-US" sz="1300" dirty="0"/>
                     </a:p>
@@ -9483,7 +9831,7 @@
                             <a:schemeClr val="tx1"/>
                           </a:solidFill>
                         </a:rPr>
-                        <a:t>今天賣舊書 300</a:t>
+                        <a:t>Uber 回家 270</a:t>
                       </a:r>
                       <a:endParaRPr lang="en-US" sz="1300" dirty="0"/>
                     </a:p>
@@ -9544,7 +9892,7 @@
                             <a:schemeClr val="accent3"/>
                           </a:solidFill>
                         </a:rPr>
-                        <a:t>收支：支出 → 應為 收入；分類：教育 → 應為 其他收入</a:t>
+                        <a:t>收支：（沒填） → 應為 支出；分類：薪資 → 應為 交通</a:t>
                       </a:r>
                       <a:endParaRPr lang="en-US" sz="1300" dirty="0"/>
                     </a:p>
@@ -9605,7 +9953,7 @@
                             <a:schemeClr val="accent5"/>
                           </a:solidFill>
                         </a:rPr>
-                        <a:t>「賣舊書」「中發票」是收入，規則當成支出</a:t>
+                        <a:t>收支沒填或填反</a:t>
                       </a:r>
                       <a:endParaRPr lang="en-US" sz="1300" dirty="0"/>
                     </a:p>
@@ -9668,7 +10016,7 @@
                             <a:schemeClr val="tx1"/>
                           </a:solidFill>
                         </a:rPr>
-                        <a:t>上禮拜三繳了管理費</a:t>
+                        <a:t>全家一起吃火鍋 1800</a:t>
                       </a:r>
                       <a:endParaRPr lang="en-US" sz="1300" dirty="0"/>
                     </a:p>
@@ -9729,7 +10077,7 @@
                             <a:schemeClr val="accent3"/>
                           </a:solidFill>
                         </a:rPr>
-                        <a:t>日期：2026-10-14 → 應為 2026-10-07</a:t>
+                        <a:t>金額：（沒填） → 應為 1800；分類：醫療 → 應為 餐飲</a:t>
                       </a:r>
                       <a:endParaRPr lang="en-US" sz="1300" dirty="0"/>
                     </a:p>
@@ -9790,7 +10138,7 @@
                             <a:schemeClr val="accent5"/>
                           </a:solidFill>
                         </a:rPr>
-                        <a:t>「上禮拜三」「大前天」「10/1」規則算不出來</a:t>
+                        <a:t>金額漏抄或抄錯；沒講金額時反而自己補一個</a:t>
                       </a:r>
                       <a:endParaRPr lang="en-US" sz="1300" dirty="0"/>
                     </a:p>
@@ -9853,7 +10201,7 @@
                             <a:schemeClr val="tx1"/>
                           </a:solidFill>
                         </a:rPr>
-                        <a:t>坐155公車15元</a:t>
+                        <a:t>小孩補習費四千五</a:t>
                       </a:r>
                       <a:endParaRPr lang="en-US" sz="1300" dirty="0"/>
                     </a:p>
@@ -9914,7 +10262,7 @@
                             <a:schemeClr val="accent3"/>
                           </a:solidFill>
                         </a:rPr>
-                        <a:t>金額：155 → 應為 15</a:t>
+                        <a:t>日期：（沒填） → 應為 2026-10-14；分類：（沒填） → 應為 教育</a:t>
                       </a:r>
                       <a:endParaRPr lang="en-US" sz="1300" dirty="0"/>
                     </a:p>
@@ -9975,7 +10323,7 @@
                             <a:schemeClr val="accent5"/>
                           </a:solidFill>
                         </a:rPr>
-                        <a:t>「155 公車」的 155 被當成金額</a:t>
+                        <a:t>整筆欄位都沒交出來（有時間詞的日期由程式依原句重算）</a:t>
                       </a:r>
                       <a:endParaRPr lang="en-US" sz="1300" dirty="0"/>
                     </a:p>
@@ -10084,7 +10432,7 @@
                   <a:schemeClr val="tx1"/>
                 </a:solidFill>
               </a:rPr>
-              <a:t>這幾類錯是模型擅長的語意判斷（沒見過的說法、收入還是支出、哪些數字才是金額）；日期再由程式依原句重算兜底。</a:t>
+              <a:t>小模型零樣本：分類幾乎亂挑、沒講金額一半會自己補數字，還會把原句轉成簡體。上線要用大模型，或先微調。</a:t>
             </a:r>
             <a:endParaRPr lang="en-US" sz="1400" dirty="0"/>
           </a:p>
@@ -11551,7 +11899,7 @@
                 <a:ea typeface="Calibri" pitchFamily="34" charset="-122"/>
                 <a:cs typeface="Calibri" pitchFamily="34" charset="-120"/>
               </a:rPr>
-              <a:t>735</a:t>
+              <a:t>738</a:t>
             </a:r>
             <a:endParaRPr lang="en-US" sz="4800" dirty="0"/>
           </a:p>
@@ -12896,74 +13244,92 @@
           <a:p>
             <a:pPr marL="342900" indent="-342900">
               <a:spcAft>
-                <a:spcPts val="1600"/>
+                <a:spcPts val="1000"/>
               </a:spcAft>
               <a:buSzPct val="100000"/>
               <a:buChar char="•"/>
             </a:pPr>
             <a:r>
-              <a:rPr lang="en-US" sz="1700" dirty="0">
+              <a:rPr lang="en-US" sz="1500" dirty="0">
                 <a:solidFill>
                   <a:schemeClr val="tx1"/>
                 </a:solidFill>
               </a:rPr>
               <a:t>留出集與訓練資料由 AI 產生；程式驗算過金額、日期、收支，但句型比真人整齊</a:t>
             </a:r>
-            <a:endParaRPr lang="en-US" sz="1700" dirty="0"/>
+            <a:endParaRPr lang="en-US" sz="1500" dirty="0"/>
           </a:p>
           <a:p>
             <a:pPr marL="342900" indent="-342900">
               <a:spcAft>
-                <a:spcPts val="1600"/>
+                <a:spcPts val="1000"/>
               </a:spcAft>
               <a:buSzPct val="100000"/>
               <a:buChar char="•"/>
             </a:pPr>
             <a:r>
-              <a:rPr lang="en-US" sz="1700" dirty="0">
+              <a:rPr lang="en-US" sz="1500" dirty="0">
                 <a:solidFill>
                   <a:schemeClr val="tx1"/>
                 </a:solidFill>
               </a:rPr>
-              <a:t>模型的成績還沒跑，簡報上只有規則的基準線</a:t>
-            </a:r>
-            <a:endParaRPr lang="en-US" sz="1700" dirty="0"/>
+              <a:t>只在本機測了 deepseek-r1:1.5b；商業 API 與微調模型還沒跑同一份題目</a:t>
+            </a:r>
+            <a:endParaRPr lang="en-US" sz="1500" dirty="0"/>
           </a:p>
           <a:p>
             <a:pPr marL="342900" indent="-342900">
               <a:spcAft>
-                <a:spcPts val="1600"/>
+                <a:spcPts val="1000"/>
               </a:spcAft>
               <a:buSzPct val="100000"/>
               <a:buChar char="•"/>
             </a:pPr>
             <a:r>
-              <a:rPr lang="en-US" sz="1700" dirty="0">
+              <a:rPr lang="en-US" sz="1500" dirty="0">
                 <a:solidFill>
                   <a:schemeClr val="tx1"/>
                 </a:solidFill>
               </a:rPr>
-              <a:t>免費主機會休眠：第一次開要等一下；CPU 跑開源模型一段話要十幾秒</a:t>
-            </a:r>
-            <a:endParaRPr lang="en-US" sz="1700" dirty="0"/>
+              <a:t>數字出處檢查只確認數字有來源，不確認套在對的對象上（本機模型把總支出的 24.9% 說成交通）</a:t>
+            </a:r>
+            <a:endParaRPr lang="en-US" sz="1500" dirty="0"/>
           </a:p>
           <a:p>
             <a:pPr marL="342900" indent="-342900">
               <a:spcAft>
-                <a:spcPts val="1600"/>
+                <a:spcPts val="1000"/>
               </a:spcAft>
               <a:buSzPct val="100000"/>
               <a:buChar char="•"/>
             </a:pPr>
             <a:r>
-              <a:rPr lang="en-US" sz="1700" dirty="0">
+              <a:rPr lang="en-US" sz="1500" dirty="0">
                 <a:solidFill>
                   <a:schemeClr val="tx1"/>
                 </a:solidFill>
               </a:rPr>
+              <a:t>免費主機會休眠：第一次開要等一下；CPU 跑開源模型一段話要十幾秒</a:t>
+            </a:r>
+            <a:endParaRPr lang="en-US" sz="1500" dirty="0"/>
+          </a:p>
+          <a:p>
+            <a:pPr marL="342900" indent="-342900">
+              <a:spcAft>
+                <a:spcPts val="1000"/>
+              </a:spcAft>
+              <a:buSzPct val="100000"/>
+              <a:buChar char="•"/>
+            </a:pPr>
+            <a:r>
+              <a:rPr lang="en-US" sz="1500" dirty="0">
+                <a:solidFill>
+                  <a:schemeClr val="tx1"/>
+                </a:solidFill>
+              </a:rPr>
               <a:t>財務建議沒有標準答案，只能用規則檢查（數字出處、邊界）加上人看</a:t>
             </a:r>
-            <a:endParaRPr lang="en-US" sz="1700" dirty="0"/>
+            <a:endParaRPr lang="en-US" sz="1500" dirty="0"/>
           </a:p>
         </p:txBody>
       </p:sp>
@@ -13102,74 +13468,74 @@
           <a:p>
             <a:pPr marL="342900" indent="-342900">
               <a:spcAft>
-                <a:spcPts val="1600"/>
+                <a:spcPts val="1000"/>
               </a:spcAft>
               <a:buSzPct val="100000"/>
               <a:buChar char="•"/>
             </a:pPr>
             <a:r>
-              <a:rPr lang="en-US" sz="1700" dirty="0">
+              <a:rPr lang="en-US" sz="1500" dirty="0">
                 <a:solidFill>
                   <a:schemeClr val="tx1"/>
                 </a:solidFill>
               </a:rPr>
               <a:t>把使用者改過的解析（nlp_parses.user_corrected）收進下一版留出集與訓練資料</a:t>
             </a:r>
-            <a:endParaRPr lang="en-US" sz="1700" dirty="0"/>
+            <a:endParaRPr lang="en-US" sz="1500" dirty="0"/>
           </a:p>
           <a:p>
             <a:pPr marL="342900" indent="-342900">
               <a:spcAft>
-                <a:spcPts val="1600"/>
+                <a:spcPts val="1000"/>
               </a:spcAft>
               <a:buSzPct val="100000"/>
               <a:buChar char="•"/>
             </a:pPr>
             <a:r>
-              <a:rPr lang="en-US" sz="1700" dirty="0">
+              <a:rPr lang="en-US" sz="1500" dirty="0">
                 <a:solidFill>
                   <a:schemeClr val="tx1"/>
                 </a:solidFill>
               </a:rPr>
               <a:t>微調模型與商業 API 在同一張表比較，決定哪一個上線</a:t>
             </a:r>
-            <a:endParaRPr lang="en-US" sz="1700" dirty="0"/>
+            <a:endParaRPr lang="en-US" sz="1500" dirty="0"/>
           </a:p>
           <a:p>
             <a:pPr marL="342900" indent="-342900">
               <a:spcAft>
-                <a:spcPts val="1600"/>
+                <a:spcPts val="1000"/>
               </a:spcAft>
               <a:buSzPct val="100000"/>
               <a:buChar char="•"/>
             </a:pPr>
             <a:r>
-              <a:rPr lang="en-US" sz="1700" dirty="0">
+              <a:rPr lang="en-US" sz="1500" dirty="0">
                 <a:solidFill>
                   <a:schemeClr val="tx1"/>
                 </a:solidFill>
               </a:rPr>
               <a:t>建議加上「跟上個月比」的趨勢敘述（數字一樣由資料庫先算）</a:t>
             </a:r>
-            <a:endParaRPr lang="en-US" sz="1700" dirty="0"/>
+            <a:endParaRPr lang="en-US" sz="1500" dirty="0"/>
           </a:p>
           <a:p>
             <a:pPr marL="342900" indent="-342900">
               <a:spcAft>
-                <a:spcPts val="1600"/>
+                <a:spcPts val="1000"/>
               </a:spcAft>
               <a:buSzPct val="100000"/>
               <a:buChar char="•"/>
             </a:pPr>
             <a:r>
-              <a:rPr lang="en-US" sz="1700" dirty="0">
+              <a:rPr lang="en-US" sz="1500" dirty="0">
                 <a:solidFill>
                   <a:schemeClr val="tx1"/>
                 </a:solidFill>
               </a:rPr>
               <a:t>家長端的零用金超支即時通知</a:t>
             </a:r>
-            <a:endParaRPr lang="en-US" sz="1700" dirty="0"/>
+            <a:endParaRPr lang="en-US" sz="1500" dirty="0"/>
           </a:p>
         </p:txBody>
       </p:sp>
@@ -14524,7 +14890,7 @@
                 <a:ea typeface="Calibri" pitchFamily="34" charset="-122"/>
                 <a:cs typeface="Calibri" pitchFamily="34" charset="-120"/>
               </a:rPr>
-              <a:t>735</a:t>
+              <a:t>738</a:t>
             </a:r>
             <a:endParaRPr lang="en-US" sz="4800" dirty="0"/>
           </a:p>

--- a/report/家庭記帳_期末報告.pptx
+++ b/report/家庭記帳_期末報告.pptx
@@ -28,9 +28,11 @@
     <p:sldId id="276" r:id="rId22"/>
     <p:sldId id="277" r:id="rId23"/>
     <p:sldId id="278" r:id="rId24"/>
+    <p:sldId id="279" r:id="rId25"/>
+    <p:sldId id="280" r:id="rId26"/>
   </p:sldIdLst>
   <p:notesMasterIdLst>
-    <p:notesMasterId r:id="rId25"/>
+    <p:notesMasterId r:id="rId27"/>
   </p:notesMasterIdLst>
   <p:sldSz cx="12192000" cy="6858000"/>
   <p:notesSz cx="6858000" cy="12192000"/>
@@ -129,14 +131,14 @@
   <p:extLst>
     <p:ext uri="{521415D9-36F7-43E2-AB2F-B90AF26B5E84}">
       <p14:sectionLst xmlns:p14="http://schemas.microsoft.com/office/powerpoint/2010/main">
-        <p14:section name="開場" id="{d4c57958-0335-0c60-e7b8-512ae8ed2c84}">
+        <p14:section name="開場" id="{74448a68-f626-bb8c-fa47-b3c95b2e4204}">
           <p14:sldIdLst>
             <p14:sldId id="256"/>
             <p14:sldId id="257"/>
             <p14:sldId id="258"/>
           </p14:sldIdLst>
         </p14:section>
-        <p14:section name="系統" id="{bc5f5019-0b62-9350-e4b0-1bbd408d9720}">
+        <p14:section name="系統" id="{aab9eb70-5c26-444b-8025-3af714f701a9}">
           <p14:sldIdLst>
             <p14:sldId id="259"/>
             <p14:sldId id="260"/>
@@ -147,7 +149,7 @@
             <p14:sldId id="265"/>
           </p14:sldIdLst>
         </p14:section>
-        <p14:section name="AI 功能" id="{b29ed07f-fdce-155e-0a39-db4490dfcb9e}">
+        <p14:section name="AI 功能" id="{2c9c68f3-ef50-3fd6-68af-17ecd6fd6d51}">
           <p14:sldIdLst>
             <p14:sldId id="266"/>
             <p14:sldId id="267"/>
@@ -156,7 +158,7 @@
             <p14:sldId id="270"/>
           </p14:sldIdLst>
         </p14:section>
-        <p14:section name="評測與測試" id="{5d516a3a-5ecc-95e3-d499-5ae76c1f6426}">
+        <p14:section name="評測與測試" id="{c49c79de-03b9-aee1-8c19-3df6cf46b8b7}">
           <p14:sldIdLst>
             <p14:sldId id="271"/>
             <p14:sldId id="272"/>
@@ -164,12 +166,14 @@
             <p14:sldId id="274"/>
             <p14:sldId id="275"/>
             <p14:sldId id="276"/>
+            <p14:sldId id="277"/>
           </p14:sldIdLst>
         </p14:section>
-        <p14:section name="結語" id="{0be31150-3dcc-b5c5-c8bb-48511eacfea0}">
+        <p14:section name="結語" id="{fcd82673-5660-f185-d6b9-1f34ec615851}">
           <p14:sldIdLst>
-            <p14:sldId id="277"/>
             <p14:sldId id="278"/>
+            <p14:sldId id="279"/>
+            <p14:sldId id="280"/>
           </p14:sldIdLst>
         </p14:section>
       </p14:sectionLst>
@@ -2450,7 +2454,7 @@
           <a:p>
             <a:r>
               <a:rPr lang="en-US" dirty="0"/>
-              <a:t>測試分兩層。833 個自動測試在每次改程式時跑；端到端測試則是真的開一台伺服器、用全新的資料庫，從註冊一路走到停權，95 個步驟全部通過。右邊是其中幾個跟安全有關的檢查。</a:t>
+              <a:t>測試分兩層。850 個自動測試在每次改程式時跑；端到端測試則是真的開一台伺服器、用全新的資料庫，從註冊一路走到停權，96 個步驟全部通過。右邊是其中幾個跟安全有關的檢查。</a:t>
             </a:r>
             <a:endParaRPr lang="en-US" dirty="0"/>
           </a:p>
@@ -2626,7 +2630,7 @@
           <a:p>
             <a:r>
               <a:rPr lang="en-US" dirty="0"/>
-              <a:t>最後是限制與下一步。最重要的限制是資料由 AI 產生；下一步是把使用者真的改過的解析收回來，變成真實的評測與訓練資料。</a:t>
+              <a:t>前兩輪是我們用測試帳號替使用者走一遍；第三輪是使用者本人打開網站，指出看了會困惑的地方。共同點是同一件事講太多遍、用不到的東西一直掛著。我們照他的話收乾淨：帳本只剩一份清單、收入支出各自點進去、首頁寫家庭的名字、主題自己一頁、搜尋和帳本切換只在用得到的頁面出現。</a:t>
             </a:r>
             <a:endParaRPr lang="en-US" dirty="0"/>
           </a:p>
@@ -2714,7 +2718,7 @@
           <a:p>
             <a:r>
               <a:rPr lang="en-US" dirty="0"/>
-              <a:t>謝謝大家，歡迎提問。</a:t>
+              <a:t>最後是限制與下一步。最重要的限制是資料由 AI 產生；下一步是把使用者真的改過的解析收回來，變成真實的評測與訓練資料。</a:t>
             </a:r>
             <a:endParaRPr lang="en-US" dirty="0"/>
           </a:p>
@@ -2738,6 +2742,182 @@
             <a:fld id="{F7021451-1387-4CA6-816F-3879F97B5CBC}" type="slidenum">
               <a:rPr lang="en-US"/>
               <a:t>23</a:t>
+            </a:fld>
+            <a:endParaRPr lang="en-US"/>
+          </a:p>
+        </p:txBody>
+      </p:sp>
+    </p:spTree>
+    <p:extLst>
+      <p:ext uri="{BB962C8B-B14F-4D97-AF65-F5344CB8AC3E}">
+        <p14:creationId xmlns:p14="http://schemas.microsoft.com/office/powerpoint/2010/main" val="1024086991"/>
+      </p:ext>
+    </p:extLst>
+  </p:cSld>
+  <p:clrMapOvr>
+    <a:masterClrMapping/>
+  </p:clrMapOvr>
+</p:notes>
+</file>
+
+<file path=ppt/notesSlides/notesSlide24.xml><?xml version="1.0" encoding="utf-8"?>
+<p:notes xmlns:a="http://schemas.openxmlformats.org/drawingml/2006/main" xmlns:r="http://schemas.openxmlformats.org/officeDocument/2006/relationships" xmlns:p="http://schemas.openxmlformats.org/presentationml/2006/main">
+  <p:cSld>
+    <p:spTree>
+      <p:nvGrpSpPr>
+        <p:cNvPr id="1" name=""/>
+        <p:cNvGrpSpPr/>
+        <p:nvPr/>
+      </p:nvGrpSpPr>
+      <p:grpSpPr>
+        <a:xfrm>
+          <a:off x="0" y="0"/>
+          <a:ext cx="0" cy="0"/>
+          <a:chOff x="0" y="0"/>
+          <a:chExt cx="0" cy="0"/>
+        </a:xfrm>
+      </p:grpSpPr>
+      <p:sp>
+        <p:nvSpPr>
+          <p:cNvPr id="2" name="Slide Image Placeholder 1"/>
+          <p:cNvSpPr>
+            <a:spLocks noGrp="1" noRot="1" noChangeAspect="1"/>
+          </p:cNvSpPr>
+          <p:nvPr>
+            <p:ph type="sldImg"/>
+          </p:nvPr>
+        </p:nvSpPr>
+        <p:spPr/>
+      </p:sp>
+      <p:sp>
+        <p:nvSpPr>
+          <p:cNvPr id="3" name="Notes Placeholder 2"/>
+          <p:cNvSpPr>
+            <a:spLocks noGrp="1"/>
+          </p:cNvSpPr>
+          <p:nvPr>
+            <p:ph type="body" idx="1"/>
+          </p:nvPr>
+        </p:nvSpPr>
+        <p:spPr/>
+        <p:txBody>
+          <a:bodyPr/>
+          <a:lstStyle/>
+          <a:p>
+            <a:r>
+              <a:rPr lang="en-US" dirty="0"/>
+              <a:t>這是展示前根據使用者回饋定案的下一版。使用者說：這不應該是管理、控制子女的系統，而是開放式的。所以成員一律平等，家庭的帳來自每個人自己選擇併進去的明細，兩邊都算。後端第一段已經完成、測試全部通過，前端會在下一版上線。</a:t>
+            </a:r>
+            <a:endParaRPr lang="en-US" dirty="0"/>
+          </a:p>
+        </p:txBody>
+      </p:sp>
+      <p:sp>
+        <p:nvSpPr>
+          <p:cNvPr id="4" name="Slide Number Placeholder 3"/>
+          <p:cNvSpPr>
+            <a:spLocks noGrp="1"/>
+          </p:cNvSpPr>
+          <p:nvPr>
+            <p:ph type="sldNum" sz="quarter" idx="10"/>
+          </p:nvPr>
+        </p:nvSpPr>
+        <p:spPr/>
+        <p:txBody>
+          <a:bodyPr/>
+          <a:lstStyle/>
+          <a:p>
+            <a:fld id="{F7021451-1387-4CA6-816F-3879F97B5CBC}" type="slidenum">
+              <a:rPr lang="en-US"/>
+              <a:t>24</a:t>
+            </a:fld>
+            <a:endParaRPr lang="en-US"/>
+          </a:p>
+        </p:txBody>
+      </p:sp>
+    </p:spTree>
+    <p:extLst>
+      <p:ext uri="{BB962C8B-B14F-4D97-AF65-F5344CB8AC3E}">
+        <p14:creationId xmlns:p14="http://schemas.microsoft.com/office/powerpoint/2010/main" val="1024086991"/>
+      </p:ext>
+    </p:extLst>
+  </p:cSld>
+  <p:clrMapOvr>
+    <a:masterClrMapping/>
+  </p:clrMapOvr>
+</p:notes>
+</file>
+
+<file path=ppt/notesSlides/notesSlide25.xml><?xml version="1.0" encoding="utf-8"?>
+<p:notes xmlns:a="http://schemas.openxmlformats.org/drawingml/2006/main" xmlns:r="http://schemas.openxmlformats.org/officeDocument/2006/relationships" xmlns:p="http://schemas.openxmlformats.org/presentationml/2006/main">
+  <p:cSld>
+    <p:spTree>
+      <p:nvGrpSpPr>
+        <p:cNvPr id="1" name=""/>
+        <p:cNvGrpSpPr/>
+        <p:nvPr/>
+      </p:nvGrpSpPr>
+      <p:grpSpPr>
+        <a:xfrm>
+          <a:off x="0" y="0"/>
+          <a:ext cx="0" cy="0"/>
+          <a:chOff x="0" y="0"/>
+          <a:chExt cx="0" cy="0"/>
+        </a:xfrm>
+      </p:grpSpPr>
+      <p:sp>
+        <p:nvSpPr>
+          <p:cNvPr id="2" name="Slide Image Placeholder 1"/>
+          <p:cNvSpPr>
+            <a:spLocks noGrp="1" noRot="1" noChangeAspect="1"/>
+          </p:cNvSpPr>
+          <p:nvPr>
+            <p:ph type="sldImg"/>
+          </p:nvPr>
+        </p:nvSpPr>
+        <p:spPr/>
+      </p:sp>
+      <p:sp>
+        <p:nvSpPr>
+          <p:cNvPr id="3" name="Notes Placeholder 2"/>
+          <p:cNvSpPr>
+            <a:spLocks noGrp="1"/>
+          </p:cNvSpPr>
+          <p:nvPr>
+            <p:ph type="body" idx="1"/>
+          </p:nvPr>
+        </p:nvSpPr>
+        <p:spPr/>
+        <p:txBody>
+          <a:bodyPr/>
+          <a:lstStyle/>
+          <a:p>
+            <a:r>
+              <a:rPr lang="en-US" dirty="0"/>
+              <a:t>謝謝大家，歡迎提問。</a:t>
+            </a:r>
+            <a:endParaRPr lang="en-US" dirty="0"/>
+          </a:p>
+        </p:txBody>
+      </p:sp>
+      <p:sp>
+        <p:nvSpPr>
+          <p:cNvPr id="4" name="Slide Number Placeholder 3"/>
+          <p:cNvSpPr>
+            <a:spLocks noGrp="1"/>
+          </p:cNvSpPr>
+          <p:nvPr>
+            <p:ph type="sldNum" sz="quarter" idx="10"/>
+          </p:nvPr>
+        </p:nvSpPr>
+        <p:spPr/>
+        <p:txBody>
+          <a:bodyPr/>
+          <a:lstStyle/>
+          <a:p>
+            <a:fld id="{F7021451-1387-4CA6-816F-3879F97B5CBC}" type="slidenum">
+              <a:rPr lang="en-US"/>
+              <a:t>25</a:t>
             </a:fld>
             <a:endParaRPr lang="en-US"/>
           </a:p>
@@ -2802,7 +2982,7 @@
           <a:p>
             <a:r>
               <a:rPr lang="en-US" dirty="0"/>
-              <a:t>先講成果。79 支 API、22 張表、833 個自動測試全部通過；端到端測試用真的伺服器把四個領域走一遍，95 個步驟全部通過。AI 解析有 101 題的留出集來量成績。</a:t>
+              <a:t>先講成果。79 支 API、22 張表、850 個自動測試全部通過；端到端測試用真的伺服器把四個領域走一遍，96 個步驟全部通過。AI 解析有 101 題的留出集來量成績。</a:t>
             </a:r>
             <a:endParaRPr lang="en-US" dirty="0"/>
           </a:p>
@@ -15361,7 +15541,7 @@
                 <a:ea typeface="Calibri" pitchFamily="34" charset="-122"/>
                 <a:cs typeface="Calibri" pitchFamily="34" charset="-120"/>
               </a:rPr>
-              <a:t>833</a:t>
+              <a:t>850</a:t>
             </a:r>
             <a:endParaRPr lang="en-US" sz="4800" dirty="0"/>
           </a:p>
@@ -15499,7 +15679,7 @@
                 <a:ea typeface="Calibri" pitchFamily="34" charset="-122"/>
                 <a:cs typeface="Calibri" pitchFamily="34" charset="-120"/>
               </a:rPr>
-              <a:t>95/95</a:t>
+              <a:t>96/96</a:t>
             </a:r>
             <a:endParaRPr lang="en-US" sz="4800" dirty="0"/>
           </a:p>
@@ -15571,7 +15751,7 @@
                   <a:schemeClr val="accent5"/>
                 </a:solidFill>
               </a:rPr>
-              <a:t>認證 35/35　家庭 20/20　記帳 26/26　數字 14/14</a:t>
+              <a:t>認證 36/36　家庭 20/20　記帳 26/26　數字 14/14</a:t>
             </a:r>
             <a:endParaRPr lang="en-US" sz="1200" dirty="0"/>
           </a:p>
@@ -17372,7 +17552,7 @@
                   <a:schemeClr val="tx1"/>
                 </a:solidFill>
               </a:rPr>
-              <a:t>完整測試流程影片（約 3 分鐘）</a:t>
+              <a:t>完整測試流程影片（約 4 分鐘，游標標出每一次點擊）</a:t>
             </a:r>
             <a:endParaRPr lang="en-US" sz="1300" dirty="0"/>
           </a:p>
@@ -17498,7 +17678,7 @@
                   <a:schemeClr val="tx2"/>
                 </a:solidFill>
               </a:rPr>
-              <a:t>限制與下一步</a:t>
+              <a:t>第三輪：照使用者的話把畫面收乾淨</a:t>
             </a:r>
             <a:endParaRPr lang="en-US" sz="3200" dirty="0"/>
           </a:p>
@@ -17506,59 +17686,41 @@
       </p:sp>
       <p:sp>
         <p:nvSpPr>
-          <p:cNvPr id="3" name="lim-0"/>
+          <p:cNvPr id="3" name="shot-groups-frame"/>
           <p:cNvSpPr/>
           <p:nvPr/>
         </p:nvSpPr>
         <p:spPr>
           <a:xfrm>
-            <a:off x="548640" y="1417320"/>
-            <a:ext cx="5440680" cy="4663440"/>
+            <a:off x="557784" y="1289304"/>
+            <a:ext cx="6473952" cy="4107942"/>
           </a:xfrm>
           <a:prstGeom prst="roundRect">
             <a:avLst>
-              <a:gd name="adj" fmla="val 2745"/>
+              <a:gd name="adj" fmla="val 2671"/>
             </a:avLst>
           </a:prstGeom>
           <a:solidFill>
-            <a:schemeClr val="bg2"/>
+            <a:schemeClr val="bg1"/>
           </a:solidFill>
-          <a:ln w="12700">
+          <a:ln w="9525">
             <a:solidFill>
-              <a:schemeClr val="bg2"/>
+              <a:srgbClr val="D6E0EE"/>
             </a:solidFill>
             <a:prstDash val="solid"/>
           </a:ln>
-        </p:spPr>
-      </p:sp>
-      <p:sp>
-        <p:nvSpPr>
-          <p:cNvPr id="4" name="lim-ic-0-circle"/>
-          <p:cNvSpPr/>
-          <p:nvPr/>
-        </p:nvSpPr>
-        <p:spPr>
-          <a:xfrm>
-            <a:off x="868680" y="1645920"/>
-            <a:ext cx="594360" cy="594360"/>
-          </a:xfrm>
-          <a:prstGeom prst="ellipse">
-            <a:avLst/>
-          </a:prstGeom>
-          <a:solidFill>
-            <a:schemeClr val="accent3"/>
-          </a:solidFill>
-          <a:ln w="12700">
-            <a:solidFill>
-              <a:schemeClr val="accent3"/>
-            </a:solidFill>
-            <a:prstDash val="solid"/>
-          </a:ln>
+          <a:effectLst>
+            <a:outerShdw sx="100000" sy="100000" kx="0" ky="0" algn="bl" rotWithShape="0" blurRad="127000" dist="38100" dir="5400000">
+              <a:srgbClr val="0B2A5B">
+                <a:alpha val="14000"/>
+              </a:srgbClr>
+            </a:outerShdw>
+          </a:effectLst>
         </p:spPr>
       </p:sp>
       <p:pic>
         <p:nvPicPr>
-          <p:cNvPr id="5" name="lim-ic-0-icon" descr="preencoded.png">    </p:cNvPr>
+          <p:cNvPr id="4" name="shot-groups" descr="C:\Users\User\Desktop\agent\final_project\report\assets\groups.png">    </p:cNvPr>
           <p:cNvPicPr>
             <a:picLocks noChangeAspect="1"/>
           </p:cNvPicPr>
@@ -17572,8 +17734,8 @@
         </p:blipFill>
         <p:spPr>
           <a:xfrm>
-            <a:off x="1023214" y="1800454"/>
-            <a:ext cx="285293" cy="285293"/>
+            <a:off x="640080" y="1371600"/>
+            <a:ext cx="6309360" cy="3943350"/>
           </a:xfrm>
           <a:prstGeom prst="rect">
             <a:avLst/>
@@ -17582,189 +17744,14 @@
       </p:pic>
       <p:sp>
         <p:nvSpPr>
-          <p:cNvPr id="6" name="Text 3"/>
-          <p:cNvSpPr txBox="1"/>
-          <p:nvPr/>
-        </p:nvSpPr>
-        <p:spPr>
-          <a:xfrm>
-            <a:off x="1645920" y="1645920"/>
-            <a:ext cx="4023360" cy="594360"/>
-          </a:xfrm>
-          <a:prstGeom prst="rect">
-            <a:avLst/>
-          </a:prstGeom>
-          <a:noFill/>
-          <a:ln/>
-        </p:spPr>
-        <p:txBody>
-          <a:bodyPr wrap="square" lIns="0" tIns="0" rIns="0" bIns="0" rtlCol="0" anchor="ctr"/>
-          <a:lstStyle/>
-          <a:p>
-            <a:pPr indent="0" marL="0">
-              <a:buNone/>
-            </a:pPr>
-            <a:r>
-              <a:rPr lang="en-US" sz="2000" b="1" dirty="0">
-                <a:solidFill>
-                  <a:schemeClr val="tx2"/>
-                </a:solidFill>
-              </a:rPr>
-              <a:t>限制</a:t>
-            </a:r>
-            <a:endParaRPr lang="en-US" sz="2000" dirty="0"/>
-          </a:p>
-        </p:txBody>
-      </p:sp>
-      <p:sp>
-        <p:nvSpPr>
-          <p:cNvPr id="7" name="Text 4"/>
-          <p:cNvSpPr txBox="1"/>
-          <p:nvPr/>
-        </p:nvSpPr>
-        <p:spPr>
-          <a:xfrm>
-            <a:off x="868680" y="2514600"/>
-            <a:ext cx="4846320" cy="3383280"/>
-          </a:xfrm>
-          <a:prstGeom prst="rect">
-            <a:avLst/>
-          </a:prstGeom>
-          <a:noFill/>
-          <a:ln/>
-        </p:spPr>
-        <p:txBody>
-          <a:bodyPr wrap="square" lIns="0" tIns="0" rIns="0" bIns="0" rtlCol="0" anchor="t"/>
-          <a:lstStyle/>
-          <a:p>
-            <a:pPr marL="342900" indent="-342900">
-              <a:spcAft>
-                <a:spcPts val="1000"/>
-              </a:spcAft>
-              <a:buSzPct val="100000"/>
-              <a:buChar char="•"/>
-            </a:pPr>
-            <a:r>
-              <a:rPr lang="en-US" sz="1500" dirty="0">
-                <a:solidFill>
-                  <a:schemeClr val="tx1"/>
-                </a:solidFill>
-              </a:rPr>
-              <a:t>留出集與訓練資料由 AI 產生；程式驗算過金額、日期、收支，但句型比真人整齊——線上那一套全對，不代表真人說的話都對</a:t>
-            </a:r>
-            <a:endParaRPr lang="en-US" sz="1500" dirty="0"/>
-          </a:p>
-          <a:p>
-            <a:pPr marL="342900" indent="-342900">
-              <a:spcAft>
-                <a:spcPts val="1000"/>
-              </a:spcAft>
-              <a:buSzPct val="100000"/>
-              <a:buChar char="•"/>
-            </a:pPr>
-            <a:r>
-              <a:rPr lang="en-US" sz="1500" dirty="0">
-                <a:solidFill>
-                  <a:schemeClr val="tx1"/>
-                </a:solidFill>
-              </a:rPr>
-              <a:t>微調的小模型還沒跑同一份題目；本機 1.5B 零樣本只有 6.9%</a:t>
-            </a:r>
-            <a:endParaRPr lang="en-US" sz="1500" dirty="0"/>
-          </a:p>
-          <a:p>
-            <a:pPr marL="342900" indent="-342900">
-              <a:spcAft>
-                <a:spcPts val="1000"/>
-              </a:spcAft>
-              <a:buSzPct val="100000"/>
-              <a:buChar char="•"/>
-            </a:pPr>
-            <a:r>
-              <a:rPr lang="en-US" sz="1500" dirty="0">
-                <a:solidFill>
-                  <a:schemeClr val="tx1"/>
-                </a:solidFill>
-              </a:rPr>
-              <a:t>財務建議沒有標準答案，只能用規則檢查（數字出處、套錯分類、邊界）加上人看</a:t>
-            </a:r>
-            <a:endParaRPr lang="en-US" sz="1500" dirty="0"/>
-          </a:p>
-          <a:p>
-            <a:pPr marL="342900" indent="-342900">
-              <a:spcAft>
-                <a:spcPts val="1000"/>
-              </a:spcAft>
-              <a:buSzPct val="100000"/>
-              <a:buChar char="•"/>
-            </a:pPr>
-            <a:r>
-              <a:rPr lang="en-US" sz="1500" dirty="0">
-                <a:solidFill>
-                  <a:schemeClr val="tx1"/>
-                </a:solidFill>
-              </a:rPr>
-              <a:t>防濫用的規則只看次數：換來源的攻擊只擋得住「同一個帳號錯太多次」那一條</a:t>
-            </a:r>
-            <a:endParaRPr lang="en-US" sz="1500" dirty="0"/>
-          </a:p>
-          <a:p>
-            <a:pPr marL="342900" indent="-342900">
-              <a:spcAft>
-                <a:spcPts val="1000"/>
-              </a:spcAft>
-              <a:buSzPct val="100000"/>
-              <a:buChar char="•"/>
-            </a:pPr>
-            <a:r>
-              <a:rPr lang="en-US" sz="1500" dirty="0">
-                <a:solidFill>
-                  <a:schemeClr val="tx1"/>
-                </a:solidFill>
-              </a:rPr>
-              <a:t>免費主機會休眠：第一次開要等一下</a:t>
-            </a:r>
-            <a:endParaRPr lang="en-US" sz="1500" dirty="0"/>
-          </a:p>
-        </p:txBody>
-      </p:sp>
-      <p:sp>
-        <p:nvSpPr>
-          <p:cNvPr id="8" name="lim-1"/>
+          <p:cNvPr id="5" name="third-c0-circle"/>
           <p:cNvSpPr/>
           <p:nvPr/>
         </p:nvSpPr>
         <p:spPr>
           <a:xfrm>
-            <a:off x="6172200" y="1417320"/>
-            <a:ext cx="5440680" cy="4663440"/>
-          </a:xfrm>
-          <a:prstGeom prst="roundRect">
-            <a:avLst>
-              <a:gd name="adj" fmla="val 2745"/>
-            </a:avLst>
-          </a:prstGeom>
-          <a:solidFill>
-            <a:schemeClr val="bg2"/>
-          </a:solidFill>
-          <a:ln w="12700">
-            <a:solidFill>
-              <a:schemeClr val="bg2"/>
-            </a:solidFill>
-            <a:prstDash val="solid"/>
-          </a:ln>
-        </p:spPr>
-      </p:sp>
-      <p:sp>
-        <p:nvSpPr>
-          <p:cNvPr id="9" name="lim-ic-1-circle"/>
-          <p:cNvSpPr/>
-          <p:nvPr/>
-        </p:nvSpPr>
-        <p:spPr>
-          <a:xfrm>
-            <a:off x="6492240" y="1645920"/>
-            <a:ext cx="594360" cy="594360"/>
+            <a:off x="7315200" y="1371600"/>
+            <a:ext cx="502920" cy="502920"/>
           </a:xfrm>
           <a:prstGeom prst="ellipse">
             <a:avLst/>
@@ -17782,7 +17769,7 @@
       </p:sp>
       <p:pic>
         <p:nvPicPr>
-          <p:cNvPr id="10" name="lim-ic-1-icon" descr="preencoded.png">    </p:cNvPr>
+          <p:cNvPr id="6" name="third-c0-icon" descr="preencoded.png">    </p:cNvPr>
           <p:cNvPicPr>
             <a:picLocks noChangeAspect="1"/>
           </p:cNvPicPr>
@@ -17796,8 +17783,8 @@
         </p:blipFill>
         <p:spPr>
           <a:xfrm>
-            <a:off x="6646774" y="1800454"/>
-            <a:ext cx="285293" cy="285293"/>
+            <a:off x="7445959" y="1502359"/>
+            <a:ext cx="241402" cy="241402"/>
           </a:xfrm>
           <a:prstGeom prst="rect">
             <a:avLst/>
@@ -17806,14 +17793,14 @@
       </p:pic>
       <p:sp>
         <p:nvSpPr>
-          <p:cNvPr id="11" name="Text 7"/>
+          <p:cNvPr id="7" name="Text 3"/>
           <p:cNvSpPr txBox="1"/>
           <p:nvPr/>
         </p:nvSpPr>
         <p:spPr>
           <a:xfrm>
-            <a:off x="7269480" y="1645920"/>
-            <a:ext cx="4023360" cy="594360"/>
+            <a:off x="7955280" y="1335024"/>
+            <a:ext cx="3703320" cy="365760"/>
           </a:xfrm>
           <a:prstGeom prst="rect">
             <a:avLst/>
@@ -17822,34 +17809,34 @@
           <a:ln/>
         </p:spPr>
         <p:txBody>
-          <a:bodyPr wrap="square" lIns="0" tIns="0" rIns="0" bIns="0" rtlCol="0" anchor="ctr"/>
+          <a:bodyPr wrap="square" lIns="0" tIns="0" rIns="0" bIns="0" rtlCol="0" anchor="t"/>
           <a:lstStyle/>
           <a:p>
             <a:pPr indent="0" marL="0">
               <a:buNone/>
             </a:pPr>
             <a:r>
-              <a:rPr lang="en-US" sz="2000" b="1" dirty="0">
+              <a:rPr lang="en-US" sz="1600" b="1" dirty="0">
                 <a:solidFill>
                   <a:schemeClr val="tx2"/>
                 </a:solidFill>
               </a:rPr>
-              <a:t>下一步</a:t>
-            </a:r>
-            <a:endParaRPr lang="en-US" sz="2000" dirty="0"/>
-          </a:p>
-        </p:txBody>
-      </p:sp>
-      <p:sp>
-        <p:nvSpPr>
-          <p:cNvPr id="12" name="Text 8"/>
+              <a:t>帳本只剩一份清單</a:t>
+            </a:r>
+            <a:endParaRPr lang="en-US" sz="1600" dirty="0"/>
+          </a:p>
+        </p:txBody>
+      </p:sp>
+      <p:sp>
+        <p:nvSpPr>
+          <p:cNvPr id="8" name="Text 4"/>
           <p:cNvSpPr txBox="1"/>
           <p:nvPr/>
         </p:nvSpPr>
         <p:spPr>
           <a:xfrm>
-            <a:off x="6492240" y="2514600"/>
-            <a:ext cx="4846320" cy="3383280"/>
+            <a:off x="7955280" y="1700784"/>
+            <a:ext cx="3703320" cy="457200"/>
           </a:xfrm>
           <a:prstGeom prst="rect">
             <a:avLst/>
@@ -17861,76 +17848,502 @@
           <a:bodyPr wrap="square" lIns="0" tIns="0" rIns="0" bIns="0" rtlCol="0" anchor="t"/>
           <a:lstStyle/>
           <a:p>
-            <a:pPr marL="342900" indent="-342900">
-              <a:spcAft>
-                <a:spcPts val="1000"/>
-              </a:spcAft>
-              <a:buSzPct val="100000"/>
-              <a:buChar char="•"/>
-            </a:pPr>
-            <a:r>
-              <a:rPr lang="en-US" sz="1500" dirty="0">
-                <a:solidFill>
-                  <a:schemeClr val="tx1"/>
-                </a:solidFill>
-              </a:rPr>
-              <a:t>把使用者改過的解析（nlp_parses.user_corrected）收進下一版留出集與訓練資料</a:t>
-            </a:r>
-            <a:endParaRPr lang="en-US" sz="1500" dirty="0"/>
-          </a:p>
-          <a:p>
-            <a:pPr marL="342900" indent="-342900">
-              <a:spcAft>
-                <a:spcPts val="1000"/>
-              </a:spcAft>
-              <a:buSzPct val="100000"/>
-              <a:buChar char="•"/>
-            </a:pPr>
-            <a:r>
-              <a:rPr lang="en-US" sz="1500" dirty="0">
-                <a:solidFill>
-                  <a:schemeClr val="tx1"/>
-                </a:solidFill>
-              </a:rPr>
-              <a:t>微調模型跑同一份題目，跟線上那一套放在同一張表比較</a:t>
-            </a:r>
-            <a:endParaRPr lang="en-US" sz="1500" dirty="0"/>
-          </a:p>
-          <a:p>
-            <a:pPr marL="342900" indent="-342900">
-              <a:spcAft>
-                <a:spcPts val="1000"/>
-              </a:spcAft>
-              <a:buSzPct val="100000"/>
-              <a:buChar char="•"/>
-            </a:pPr>
-            <a:r>
-              <a:rPr lang="en-US" sz="1500" dirty="0">
-                <a:solidFill>
-                  <a:schemeClr val="tx1"/>
-                </a:solidFill>
-              </a:rPr>
-              <a:t>建議加上「跟上個月比」的趨勢敘述（數字一樣由資料庫先算）</a:t>
-            </a:r>
-            <a:endParaRPr lang="en-US" sz="1500" dirty="0"/>
-          </a:p>
-          <a:p>
-            <a:pPr marL="342900" indent="-342900">
-              <a:spcAft>
-                <a:spcPts val="1000"/>
-              </a:spcAft>
-              <a:buSzPct val="100000"/>
-              <a:buChar char="•"/>
-            </a:pPr>
-            <a:r>
-              <a:rPr lang="en-US" sz="1500" dirty="0">
-                <a:solidFill>
-                  <a:schemeClr val="tx1"/>
-                </a:solidFill>
-              </a:rPr>
-              <a:t>家長端的零用金超支即時通知</a:t>
-            </a:r>
-            <a:endParaRPr lang="en-US" sz="1500" dirty="0"/>
+            <a:pPr indent="0" marL="0">
+              <a:buNone/>
+            </a:pPr>
+            <a:r>
+              <a:rPr lang="en-US" sz="1250" dirty="0">
+                <a:solidFill>
+                  <a:schemeClr val="accent5"/>
+                </a:solidFill>
+              </a:rPr>
+              <a:t>不分常設、活動；一顆「開一本帳」，結束日選填</a:t>
+            </a:r>
+            <a:endParaRPr lang="en-US" sz="1250" dirty="0"/>
+          </a:p>
+        </p:txBody>
+      </p:sp>
+      <p:sp>
+        <p:nvSpPr>
+          <p:cNvPr id="9" name="third-c1-circle"/>
+          <p:cNvSpPr/>
+          <p:nvPr/>
+        </p:nvSpPr>
+        <p:spPr>
+          <a:xfrm>
+            <a:off x="7315200" y="2304288"/>
+            <a:ext cx="502920" cy="502920"/>
+          </a:xfrm>
+          <a:prstGeom prst="ellipse">
+            <a:avLst/>
+          </a:prstGeom>
+          <a:solidFill>
+            <a:schemeClr val="accent1"/>
+          </a:solidFill>
+          <a:ln w="12700">
+            <a:solidFill>
+              <a:schemeClr val="accent1"/>
+            </a:solidFill>
+            <a:prstDash val="solid"/>
+          </a:ln>
+        </p:spPr>
+      </p:sp>
+      <p:pic>
+        <p:nvPicPr>
+          <p:cNvPr id="10" name="third-c1-icon" descr="preencoded.png">    </p:cNvPr>
+          <p:cNvPicPr>
+            <a:picLocks noChangeAspect="1"/>
+          </p:cNvPicPr>
+          <p:nvPr/>
+        </p:nvPicPr>
+        <p:blipFill>
+          <a:blip r:embed="rId3"/>
+          <a:stretch>
+            <a:fillRect/>
+          </a:stretch>
+        </p:blipFill>
+        <p:spPr>
+          <a:xfrm>
+            <a:off x="7445959" y="2435047"/>
+            <a:ext cx="241402" cy="241402"/>
+          </a:xfrm>
+          <a:prstGeom prst="rect">
+            <a:avLst/>
+          </a:prstGeom>
+        </p:spPr>
+      </p:pic>
+      <p:sp>
+        <p:nvSpPr>
+          <p:cNvPr id="11" name="Text 6"/>
+          <p:cNvSpPr txBox="1"/>
+          <p:nvPr/>
+        </p:nvSpPr>
+        <p:spPr>
+          <a:xfrm>
+            <a:off x="7955280" y="2267712"/>
+            <a:ext cx="3703320" cy="365760"/>
+          </a:xfrm>
+          <a:prstGeom prst="rect">
+            <a:avLst/>
+          </a:prstGeom>
+          <a:noFill/>
+          <a:ln/>
+        </p:spPr>
+        <p:txBody>
+          <a:bodyPr wrap="square" lIns="0" tIns="0" rIns="0" bIns="0" rtlCol="0" anchor="t"/>
+          <a:lstStyle/>
+          <a:p>
+            <a:pPr indent="0" marL="0">
+              <a:buNone/>
+            </a:pPr>
+            <a:r>
+              <a:rPr lang="en-US" sz="1600" b="1" dirty="0">
+                <a:solidFill>
+                  <a:schemeClr val="tx2"/>
+                </a:solidFill>
+              </a:rPr>
+              <a:t>收入、支出各自點進去</a:t>
+            </a:r>
+            <a:endParaRPr lang="en-US" sz="1600" dirty="0"/>
+          </a:p>
+        </p:txBody>
+      </p:sp>
+      <p:sp>
+        <p:nvSpPr>
+          <p:cNvPr id="12" name="Text 7"/>
+          <p:cNvSpPr txBox="1"/>
+          <p:nvPr/>
+        </p:nvSpPr>
+        <p:spPr>
+          <a:xfrm>
+            <a:off x="7955280" y="2633472"/>
+            <a:ext cx="3703320" cy="457200"/>
+          </a:xfrm>
+          <a:prstGeom prst="rect">
+            <a:avLst/>
+          </a:prstGeom>
+          <a:noFill/>
+          <a:ln/>
+        </p:spPr>
+        <p:txBody>
+          <a:bodyPr wrap="square" lIns="0" tIns="0" rIns="0" bIns="0" rtlCol="0" anchor="t"/>
+          <a:lstStyle/>
+          <a:p>
+            <a:pPr indent="0" marL="0">
+              <a:buNone/>
+            </a:pPr>
+            <a:r>
+              <a:rPr lang="en-US" sz="1250" dirty="0">
+                <a:solidFill>
+                  <a:schemeClr val="accent5"/>
+                </a:solidFill>
+              </a:rPr>
+              <a:t>點本月收入只看收入、點支出只看支出</a:t>
+            </a:r>
+            <a:endParaRPr lang="en-US" sz="1250" dirty="0"/>
+          </a:p>
+        </p:txBody>
+      </p:sp>
+      <p:sp>
+        <p:nvSpPr>
+          <p:cNvPr id="13" name="third-c2-circle"/>
+          <p:cNvSpPr/>
+          <p:nvPr/>
+        </p:nvSpPr>
+        <p:spPr>
+          <a:xfrm>
+            <a:off x="7315200" y="3236976"/>
+            <a:ext cx="502920" cy="502920"/>
+          </a:xfrm>
+          <a:prstGeom prst="ellipse">
+            <a:avLst/>
+          </a:prstGeom>
+          <a:solidFill>
+            <a:schemeClr val="accent1"/>
+          </a:solidFill>
+          <a:ln w="12700">
+            <a:solidFill>
+              <a:schemeClr val="accent1"/>
+            </a:solidFill>
+            <a:prstDash val="solid"/>
+          </a:ln>
+        </p:spPr>
+      </p:sp>
+      <p:pic>
+        <p:nvPicPr>
+          <p:cNvPr id="14" name="third-c2-icon" descr="preencoded.png">    </p:cNvPr>
+          <p:cNvPicPr>
+            <a:picLocks noChangeAspect="1"/>
+          </p:cNvPicPr>
+          <p:nvPr/>
+        </p:nvPicPr>
+        <p:blipFill>
+          <a:blip r:embed="rId4"/>
+          <a:stretch>
+            <a:fillRect/>
+          </a:stretch>
+        </p:blipFill>
+        <p:spPr>
+          <a:xfrm>
+            <a:off x="7445959" y="3367735"/>
+            <a:ext cx="241402" cy="241402"/>
+          </a:xfrm>
+          <a:prstGeom prst="rect">
+            <a:avLst/>
+          </a:prstGeom>
+        </p:spPr>
+      </p:pic>
+      <p:sp>
+        <p:nvSpPr>
+          <p:cNvPr id="15" name="Text 9"/>
+          <p:cNvSpPr txBox="1"/>
+          <p:nvPr/>
+        </p:nvSpPr>
+        <p:spPr>
+          <a:xfrm>
+            <a:off x="7955280" y="3200400"/>
+            <a:ext cx="3703320" cy="365760"/>
+          </a:xfrm>
+          <a:prstGeom prst="rect">
+            <a:avLst/>
+          </a:prstGeom>
+          <a:noFill/>
+          <a:ln/>
+        </p:spPr>
+        <p:txBody>
+          <a:bodyPr wrap="square" lIns="0" tIns="0" rIns="0" bIns="0" rtlCol="0" anchor="t"/>
+          <a:lstStyle/>
+          <a:p>
+            <a:pPr indent="0" marL="0">
+              <a:buNone/>
+            </a:pPr>
+            <a:r>
+              <a:rPr lang="en-US" sz="1600" b="1" dirty="0">
+                <a:solidFill>
+                  <a:schemeClr val="tx2"/>
+                </a:solidFill>
+              </a:rPr>
+              <a:t>寫家庭的名字</a:t>
+            </a:r>
+            <a:endParaRPr lang="en-US" sz="1600" dirty="0"/>
+          </a:p>
+        </p:txBody>
+      </p:sp>
+      <p:sp>
+        <p:nvSpPr>
+          <p:cNvPr id="16" name="Text 10"/>
+          <p:cNvSpPr txBox="1"/>
+          <p:nvPr/>
+        </p:nvSpPr>
+        <p:spPr>
+          <a:xfrm>
+            <a:off x="7955280" y="3566160"/>
+            <a:ext cx="3703320" cy="457200"/>
+          </a:xfrm>
+          <a:prstGeom prst="rect">
+            <a:avLst/>
+          </a:prstGeom>
+          <a:noFill/>
+          <a:ln/>
+        </p:spPr>
+        <p:txBody>
+          <a:bodyPr wrap="square" lIns="0" tIns="0" rIns="0" bIns="0" rtlCol="0" anchor="t"/>
+          <a:lstStyle/>
+          <a:p>
+            <a:pPr indent="0" marL="0">
+              <a:buNone/>
+            </a:pPr>
+            <a:r>
+              <a:rPr lang="en-US" sz="1250" dirty="0">
+                <a:solidFill>
+                  <a:schemeClr val="accent5"/>
+                </a:solidFill>
+              </a:rPr>
+              <a:t>常用功能那格寫「林家」，不寫「家庭帳本」</a:t>
+            </a:r>
+            <a:endParaRPr lang="en-US" sz="1250" dirty="0"/>
+          </a:p>
+        </p:txBody>
+      </p:sp>
+      <p:sp>
+        <p:nvSpPr>
+          <p:cNvPr id="17" name="third-c3-circle"/>
+          <p:cNvSpPr/>
+          <p:nvPr/>
+        </p:nvSpPr>
+        <p:spPr>
+          <a:xfrm>
+            <a:off x="7315200" y="4169664"/>
+            <a:ext cx="502920" cy="502920"/>
+          </a:xfrm>
+          <a:prstGeom prst="ellipse">
+            <a:avLst/>
+          </a:prstGeom>
+          <a:solidFill>
+            <a:schemeClr val="accent1"/>
+          </a:solidFill>
+          <a:ln w="12700">
+            <a:solidFill>
+              <a:schemeClr val="accent1"/>
+            </a:solidFill>
+            <a:prstDash val="solid"/>
+          </a:ln>
+        </p:spPr>
+      </p:sp>
+      <p:pic>
+        <p:nvPicPr>
+          <p:cNvPr id="18" name="third-c3-icon" descr="preencoded.png">    </p:cNvPr>
+          <p:cNvPicPr>
+            <a:picLocks noChangeAspect="1"/>
+          </p:cNvPicPr>
+          <p:nvPr/>
+        </p:nvPicPr>
+        <p:blipFill>
+          <a:blip r:embed="rId5"/>
+          <a:stretch>
+            <a:fillRect/>
+          </a:stretch>
+        </p:blipFill>
+        <p:spPr>
+          <a:xfrm>
+            <a:off x="7445959" y="4300423"/>
+            <a:ext cx="241402" cy="241402"/>
+          </a:xfrm>
+          <a:prstGeom prst="rect">
+            <a:avLst/>
+          </a:prstGeom>
+        </p:spPr>
+      </p:pic>
+      <p:sp>
+        <p:nvSpPr>
+          <p:cNvPr id="19" name="Text 12"/>
+          <p:cNvSpPr txBox="1"/>
+          <p:nvPr/>
+        </p:nvSpPr>
+        <p:spPr>
+          <a:xfrm>
+            <a:off x="7955280" y="4133088"/>
+            <a:ext cx="3703320" cy="365760"/>
+          </a:xfrm>
+          <a:prstGeom prst="rect">
+            <a:avLst/>
+          </a:prstGeom>
+          <a:noFill/>
+          <a:ln/>
+        </p:spPr>
+        <p:txBody>
+          <a:bodyPr wrap="square" lIns="0" tIns="0" rIns="0" bIns="0" rtlCol="0" anchor="t"/>
+          <a:lstStyle/>
+          <a:p>
+            <a:pPr indent="0" marL="0">
+              <a:buNone/>
+            </a:pPr>
+            <a:r>
+              <a:rPr lang="en-US" sz="1600" b="1" dirty="0">
+                <a:solidFill>
+                  <a:schemeClr val="tx2"/>
+                </a:solidFill>
+              </a:rPr>
+              <a:t>主題自己一頁</a:t>
+            </a:r>
+            <a:endParaRPr lang="en-US" sz="1600" dirty="0"/>
+          </a:p>
+        </p:txBody>
+      </p:sp>
+      <p:sp>
+        <p:nvSpPr>
+          <p:cNvPr id="20" name="Text 13"/>
+          <p:cNvSpPr txBox="1"/>
+          <p:nvPr/>
+        </p:nvSpPr>
+        <p:spPr>
+          <a:xfrm>
+            <a:off x="7955280" y="4498848"/>
+            <a:ext cx="3703320" cy="457200"/>
+          </a:xfrm>
+          <a:prstGeom prst="rect">
+            <a:avLst/>
+          </a:prstGeom>
+          <a:noFill/>
+          <a:ln/>
+        </p:spPr>
+        <p:txBody>
+          <a:bodyPr wrap="square" lIns="0" tIns="0" rIns="0" bIns="0" rtlCol="0" anchor="t"/>
+          <a:lstStyle/>
+          <a:p>
+            <a:pPr indent="0" marL="0">
+              <a:buNone/>
+            </a:pPr>
+            <a:r>
+              <a:rPr lang="en-US" sz="1250" dirty="0">
+                <a:solidFill>
+                  <a:schemeClr val="accent5"/>
+                </a:solidFill>
+              </a:rPr>
+              <a:t>八套排成卡片，按一下就換</a:t>
+            </a:r>
+            <a:endParaRPr lang="en-US" sz="1250" dirty="0"/>
+          </a:p>
+        </p:txBody>
+      </p:sp>
+      <p:sp>
+        <p:nvSpPr>
+          <p:cNvPr id="21" name="third-c4-circle"/>
+          <p:cNvSpPr/>
+          <p:nvPr/>
+        </p:nvSpPr>
+        <p:spPr>
+          <a:xfrm>
+            <a:off x="7315200" y="5102352"/>
+            <a:ext cx="502920" cy="502920"/>
+          </a:xfrm>
+          <a:prstGeom prst="ellipse">
+            <a:avLst/>
+          </a:prstGeom>
+          <a:solidFill>
+            <a:schemeClr val="accent1"/>
+          </a:solidFill>
+          <a:ln w="12700">
+            <a:solidFill>
+              <a:schemeClr val="accent1"/>
+            </a:solidFill>
+            <a:prstDash val="solid"/>
+          </a:ln>
+        </p:spPr>
+      </p:sp>
+      <p:pic>
+        <p:nvPicPr>
+          <p:cNvPr id="22" name="third-c4-icon" descr="preencoded.png">    </p:cNvPr>
+          <p:cNvPicPr>
+            <a:picLocks noChangeAspect="1"/>
+          </p:cNvPicPr>
+          <p:nvPr/>
+        </p:nvPicPr>
+        <p:blipFill>
+          <a:blip r:embed="rId6"/>
+          <a:stretch>
+            <a:fillRect/>
+          </a:stretch>
+        </p:blipFill>
+        <p:spPr>
+          <a:xfrm>
+            <a:off x="7445959" y="5233111"/>
+            <a:ext cx="241402" cy="241402"/>
+          </a:xfrm>
+          <a:prstGeom prst="rect">
+            <a:avLst/>
+          </a:prstGeom>
+        </p:spPr>
+      </p:pic>
+      <p:sp>
+        <p:nvSpPr>
+          <p:cNvPr id="23" name="Text 15"/>
+          <p:cNvSpPr txBox="1"/>
+          <p:nvPr/>
+        </p:nvSpPr>
+        <p:spPr>
+          <a:xfrm>
+            <a:off x="7955280" y="5065776"/>
+            <a:ext cx="3703320" cy="365760"/>
+          </a:xfrm>
+          <a:prstGeom prst="rect">
+            <a:avLst/>
+          </a:prstGeom>
+          <a:noFill/>
+          <a:ln/>
+        </p:spPr>
+        <p:txBody>
+          <a:bodyPr wrap="square" lIns="0" tIns="0" rIns="0" bIns="0" rtlCol="0" anchor="t"/>
+          <a:lstStyle/>
+          <a:p>
+            <a:pPr indent="0" marL="0">
+              <a:buNone/>
+            </a:pPr>
+            <a:r>
+              <a:rPr lang="en-US" sz="1600" b="1" dirty="0">
+                <a:solidFill>
+                  <a:schemeClr val="tx2"/>
+                </a:solidFill>
+              </a:rPr>
+              <a:t>用不到的不掛著</a:t>
+            </a:r>
+            <a:endParaRPr lang="en-US" sz="1600" dirty="0"/>
+          </a:p>
+        </p:txBody>
+      </p:sp>
+      <p:sp>
+        <p:nvSpPr>
+          <p:cNvPr id="24" name="Text 16"/>
+          <p:cNvSpPr txBox="1"/>
+          <p:nvPr/>
+        </p:nvSpPr>
+        <p:spPr>
+          <a:xfrm>
+            <a:off x="7955280" y="5431536"/>
+            <a:ext cx="3703320" cy="457200"/>
+          </a:xfrm>
+          <a:prstGeom prst="rect">
+            <a:avLst/>
+          </a:prstGeom>
+          <a:noFill/>
+          <a:ln/>
+        </p:spPr>
+        <p:txBody>
+          <a:bodyPr wrap="square" lIns="0" tIns="0" rIns="0" bIns="0" rtlCol="0" anchor="t"/>
+          <a:lstStyle/>
+          <a:p>
+            <a:pPr indent="0" marL="0">
+              <a:buNone/>
+            </a:pPr>
+            <a:r>
+              <a:rPr lang="en-US" sz="1250" dirty="0">
+                <a:solidFill>
+                  <a:schemeClr val="accent5"/>
+                </a:solidFill>
+              </a:rPr>
+              <a:t>搜尋、帳本切換只在用得到的頁面出現</a:t>
+            </a:r>
+            <a:endParaRPr lang="en-US" sz="1250" dirty="0"/>
           </a:p>
         </p:txBody>
       </p:sp>
@@ -18014,6 +18427,1392 @@
         </p:nvSpPr>
         <p:spPr>
           <a:xfrm>
+            <a:off x="548640" y="320040"/>
+            <a:ext cx="11064240" cy="731520"/>
+          </a:xfrm>
+          <a:prstGeom prst="rect">
+            <a:avLst/>
+          </a:prstGeom>
+          <a:noFill/>
+          <a:ln/>
+        </p:spPr>
+        <p:txBody>
+          <a:bodyPr wrap="square" lIns="0" tIns="0" rIns="0" bIns="0" rtlCol="0" anchor="ctr"/>
+          <a:lstStyle/>
+          <a:p>
+            <a:pPr algn="l" indent="0" marL="0">
+              <a:buNone/>
+            </a:pPr>
+            <a:r>
+              <a:rPr lang="en-US" sz="3200" b="1" dirty="0">
+                <a:solidFill>
+                  <a:schemeClr val="tx2"/>
+                </a:solidFill>
+              </a:rPr>
+              <a:t>限制與下一步</a:t>
+            </a:r>
+            <a:endParaRPr lang="en-US" sz="3200" dirty="0"/>
+          </a:p>
+        </p:txBody>
+      </p:sp>
+      <p:sp>
+        <p:nvSpPr>
+          <p:cNvPr id="3" name="lim-0"/>
+          <p:cNvSpPr/>
+          <p:nvPr/>
+        </p:nvSpPr>
+        <p:spPr>
+          <a:xfrm>
+            <a:off x="548640" y="1417320"/>
+            <a:ext cx="5440680" cy="4663440"/>
+          </a:xfrm>
+          <a:prstGeom prst="roundRect">
+            <a:avLst>
+              <a:gd name="adj" fmla="val 2745"/>
+            </a:avLst>
+          </a:prstGeom>
+          <a:solidFill>
+            <a:schemeClr val="bg2"/>
+          </a:solidFill>
+          <a:ln w="12700">
+            <a:solidFill>
+              <a:schemeClr val="bg2"/>
+            </a:solidFill>
+            <a:prstDash val="solid"/>
+          </a:ln>
+        </p:spPr>
+      </p:sp>
+      <p:sp>
+        <p:nvSpPr>
+          <p:cNvPr id="4" name="lim-ic-0-circle"/>
+          <p:cNvSpPr/>
+          <p:nvPr/>
+        </p:nvSpPr>
+        <p:spPr>
+          <a:xfrm>
+            <a:off x="868680" y="1645920"/>
+            <a:ext cx="594360" cy="594360"/>
+          </a:xfrm>
+          <a:prstGeom prst="ellipse">
+            <a:avLst/>
+          </a:prstGeom>
+          <a:solidFill>
+            <a:schemeClr val="accent3"/>
+          </a:solidFill>
+          <a:ln w="12700">
+            <a:solidFill>
+              <a:schemeClr val="accent3"/>
+            </a:solidFill>
+            <a:prstDash val="solid"/>
+          </a:ln>
+        </p:spPr>
+      </p:sp>
+      <p:pic>
+        <p:nvPicPr>
+          <p:cNvPr id="5" name="lim-ic-0-icon" descr="preencoded.png">    </p:cNvPr>
+          <p:cNvPicPr>
+            <a:picLocks noChangeAspect="1"/>
+          </p:cNvPicPr>
+          <p:nvPr/>
+        </p:nvPicPr>
+        <p:blipFill>
+          <a:blip r:embed="rId1"/>
+          <a:stretch>
+            <a:fillRect/>
+          </a:stretch>
+        </p:blipFill>
+        <p:spPr>
+          <a:xfrm>
+            <a:off x="1023214" y="1800454"/>
+            <a:ext cx="285293" cy="285293"/>
+          </a:xfrm>
+          <a:prstGeom prst="rect">
+            <a:avLst/>
+          </a:prstGeom>
+        </p:spPr>
+      </p:pic>
+      <p:sp>
+        <p:nvSpPr>
+          <p:cNvPr id="6" name="Text 3"/>
+          <p:cNvSpPr txBox="1"/>
+          <p:nvPr/>
+        </p:nvSpPr>
+        <p:spPr>
+          <a:xfrm>
+            <a:off x="1645920" y="1645920"/>
+            <a:ext cx="4023360" cy="594360"/>
+          </a:xfrm>
+          <a:prstGeom prst="rect">
+            <a:avLst/>
+          </a:prstGeom>
+          <a:noFill/>
+          <a:ln/>
+        </p:spPr>
+        <p:txBody>
+          <a:bodyPr wrap="square" lIns="0" tIns="0" rIns="0" bIns="0" rtlCol="0" anchor="ctr"/>
+          <a:lstStyle/>
+          <a:p>
+            <a:pPr indent="0" marL="0">
+              <a:buNone/>
+            </a:pPr>
+            <a:r>
+              <a:rPr lang="en-US" sz="2000" b="1" dirty="0">
+                <a:solidFill>
+                  <a:schemeClr val="tx2"/>
+                </a:solidFill>
+              </a:rPr>
+              <a:t>限制</a:t>
+            </a:r>
+            <a:endParaRPr lang="en-US" sz="2000" dirty="0"/>
+          </a:p>
+        </p:txBody>
+      </p:sp>
+      <p:sp>
+        <p:nvSpPr>
+          <p:cNvPr id="7" name="Text 4"/>
+          <p:cNvSpPr txBox="1"/>
+          <p:nvPr/>
+        </p:nvSpPr>
+        <p:spPr>
+          <a:xfrm>
+            <a:off x="868680" y="2514600"/>
+            <a:ext cx="4846320" cy="3383280"/>
+          </a:xfrm>
+          <a:prstGeom prst="rect">
+            <a:avLst/>
+          </a:prstGeom>
+          <a:noFill/>
+          <a:ln/>
+        </p:spPr>
+        <p:txBody>
+          <a:bodyPr wrap="square" lIns="0" tIns="0" rIns="0" bIns="0" rtlCol="0" anchor="t"/>
+          <a:lstStyle/>
+          <a:p>
+            <a:pPr marL="342900" indent="-342900">
+              <a:spcAft>
+                <a:spcPts val="1000"/>
+              </a:spcAft>
+              <a:buSzPct val="100000"/>
+              <a:buChar char="•"/>
+            </a:pPr>
+            <a:r>
+              <a:rPr lang="en-US" sz="1500" dirty="0">
+                <a:solidFill>
+                  <a:schemeClr val="tx1"/>
+                </a:solidFill>
+              </a:rPr>
+              <a:t>留出集與訓練資料由 AI 產生；程式驗算過金額、日期、收支，但句型比真人整齊——線上那一套全對，不代表真人說的話都對</a:t>
+            </a:r>
+            <a:endParaRPr lang="en-US" sz="1500" dirty="0"/>
+          </a:p>
+          <a:p>
+            <a:pPr marL="342900" indent="-342900">
+              <a:spcAft>
+                <a:spcPts val="1000"/>
+              </a:spcAft>
+              <a:buSzPct val="100000"/>
+              <a:buChar char="•"/>
+            </a:pPr>
+            <a:r>
+              <a:rPr lang="en-US" sz="1500" dirty="0">
+                <a:solidFill>
+                  <a:schemeClr val="tx1"/>
+                </a:solidFill>
+              </a:rPr>
+              <a:t>微調的小模型還沒跑同一份題目；本機 1.5B 零樣本只有 6.9%</a:t>
+            </a:r>
+            <a:endParaRPr lang="en-US" sz="1500" dirty="0"/>
+          </a:p>
+          <a:p>
+            <a:pPr marL="342900" indent="-342900">
+              <a:spcAft>
+                <a:spcPts val="1000"/>
+              </a:spcAft>
+              <a:buSzPct val="100000"/>
+              <a:buChar char="•"/>
+            </a:pPr>
+            <a:r>
+              <a:rPr lang="en-US" sz="1500" dirty="0">
+                <a:solidFill>
+                  <a:schemeClr val="tx1"/>
+                </a:solidFill>
+              </a:rPr>
+              <a:t>財務建議沒有標準答案，只能用規則檢查（數字出處、套錯分類、邊界）加上人看</a:t>
+            </a:r>
+            <a:endParaRPr lang="en-US" sz="1500" dirty="0"/>
+          </a:p>
+          <a:p>
+            <a:pPr marL="342900" indent="-342900">
+              <a:spcAft>
+                <a:spcPts val="1000"/>
+              </a:spcAft>
+              <a:buSzPct val="100000"/>
+              <a:buChar char="•"/>
+            </a:pPr>
+            <a:r>
+              <a:rPr lang="en-US" sz="1500" dirty="0">
+                <a:solidFill>
+                  <a:schemeClr val="tx1"/>
+                </a:solidFill>
+              </a:rPr>
+              <a:t>防濫用的規則只看次數：換來源的攻擊只擋得住「同一個帳號錯太多次」那一條</a:t>
+            </a:r>
+            <a:endParaRPr lang="en-US" sz="1500" dirty="0"/>
+          </a:p>
+          <a:p>
+            <a:pPr marL="342900" indent="-342900">
+              <a:spcAft>
+                <a:spcPts val="1000"/>
+              </a:spcAft>
+              <a:buSzPct val="100000"/>
+              <a:buChar char="•"/>
+            </a:pPr>
+            <a:r>
+              <a:rPr lang="en-US" sz="1500" dirty="0">
+                <a:solidFill>
+                  <a:schemeClr val="tx1"/>
+                </a:solidFill>
+              </a:rPr>
+              <a:t>免費主機會休眠：第一次開要等一下</a:t>
+            </a:r>
+            <a:endParaRPr lang="en-US" sz="1500" dirty="0"/>
+          </a:p>
+        </p:txBody>
+      </p:sp>
+      <p:sp>
+        <p:nvSpPr>
+          <p:cNvPr id="8" name="lim-1"/>
+          <p:cNvSpPr/>
+          <p:nvPr/>
+        </p:nvSpPr>
+        <p:spPr>
+          <a:xfrm>
+            <a:off x="6172200" y="1417320"/>
+            <a:ext cx="5440680" cy="4663440"/>
+          </a:xfrm>
+          <a:prstGeom prst="roundRect">
+            <a:avLst>
+              <a:gd name="adj" fmla="val 2745"/>
+            </a:avLst>
+          </a:prstGeom>
+          <a:solidFill>
+            <a:schemeClr val="bg2"/>
+          </a:solidFill>
+          <a:ln w="12700">
+            <a:solidFill>
+              <a:schemeClr val="bg2"/>
+            </a:solidFill>
+            <a:prstDash val="solid"/>
+          </a:ln>
+        </p:spPr>
+      </p:sp>
+      <p:sp>
+        <p:nvSpPr>
+          <p:cNvPr id="9" name="lim-ic-1-circle"/>
+          <p:cNvSpPr/>
+          <p:nvPr/>
+        </p:nvSpPr>
+        <p:spPr>
+          <a:xfrm>
+            <a:off x="6492240" y="1645920"/>
+            <a:ext cx="594360" cy="594360"/>
+          </a:xfrm>
+          <a:prstGeom prst="ellipse">
+            <a:avLst/>
+          </a:prstGeom>
+          <a:solidFill>
+            <a:schemeClr val="accent1"/>
+          </a:solidFill>
+          <a:ln w="12700">
+            <a:solidFill>
+              <a:schemeClr val="accent1"/>
+            </a:solidFill>
+            <a:prstDash val="solid"/>
+          </a:ln>
+        </p:spPr>
+      </p:sp>
+      <p:pic>
+        <p:nvPicPr>
+          <p:cNvPr id="10" name="lim-ic-1-icon" descr="preencoded.png">    </p:cNvPr>
+          <p:cNvPicPr>
+            <a:picLocks noChangeAspect="1"/>
+          </p:cNvPicPr>
+          <p:nvPr/>
+        </p:nvPicPr>
+        <p:blipFill>
+          <a:blip r:embed="rId2"/>
+          <a:stretch>
+            <a:fillRect/>
+          </a:stretch>
+        </p:blipFill>
+        <p:spPr>
+          <a:xfrm>
+            <a:off x="6646774" y="1800454"/>
+            <a:ext cx="285293" cy="285293"/>
+          </a:xfrm>
+          <a:prstGeom prst="rect">
+            <a:avLst/>
+          </a:prstGeom>
+        </p:spPr>
+      </p:pic>
+      <p:sp>
+        <p:nvSpPr>
+          <p:cNvPr id="11" name="Text 7"/>
+          <p:cNvSpPr txBox="1"/>
+          <p:nvPr/>
+        </p:nvSpPr>
+        <p:spPr>
+          <a:xfrm>
+            <a:off x="7269480" y="1645920"/>
+            <a:ext cx="4023360" cy="594360"/>
+          </a:xfrm>
+          <a:prstGeom prst="rect">
+            <a:avLst/>
+          </a:prstGeom>
+          <a:noFill/>
+          <a:ln/>
+        </p:spPr>
+        <p:txBody>
+          <a:bodyPr wrap="square" lIns="0" tIns="0" rIns="0" bIns="0" rtlCol="0" anchor="ctr"/>
+          <a:lstStyle/>
+          <a:p>
+            <a:pPr indent="0" marL="0">
+              <a:buNone/>
+            </a:pPr>
+            <a:r>
+              <a:rPr lang="en-US" sz="2000" b="1" dirty="0">
+                <a:solidFill>
+                  <a:schemeClr val="tx2"/>
+                </a:solidFill>
+              </a:rPr>
+              <a:t>下一步</a:t>
+            </a:r>
+            <a:endParaRPr lang="en-US" sz="2000" dirty="0"/>
+          </a:p>
+        </p:txBody>
+      </p:sp>
+      <p:sp>
+        <p:nvSpPr>
+          <p:cNvPr id="12" name="Text 8"/>
+          <p:cNvSpPr txBox="1"/>
+          <p:nvPr/>
+        </p:nvSpPr>
+        <p:spPr>
+          <a:xfrm>
+            <a:off x="6492240" y="2514600"/>
+            <a:ext cx="4846320" cy="3383280"/>
+          </a:xfrm>
+          <a:prstGeom prst="rect">
+            <a:avLst/>
+          </a:prstGeom>
+          <a:noFill/>
+          <a:ln/>
+        </p:spPr>
+        <p:txBody>
+          <a:bodyPr wrap="square" lIns="0" tIns="0" rIns="0" bIns="0" rtlCol="0" anchor="t"/>
+          <a:lstStyle/>
+          <a:p>
+            <a:pPr marL="342900" indent="-342900">
+              <a:spcAft>
+                <a:spcPts val="1000"/>
+              </a:spcAft>
+              <a:buSzPct val="100000"/>
+              <a:buChar char="•"/>
+            </a:pPr>
+            <a:r>
+              <a:rPr lang="en-US" sz="1500" dirty="0">
+                <a:solidFill>
+                  <a:schemeClr val="tx1"/>
+                </a:solidFill>
+              </a:rPr>
+              <a:t>把使用者改過的解析（nlp_parses.user_corrected）收進下一版留出集與訓練資料</a:t>
+            </a:r>
+            <a:endParaRPr lang="en-US" sz="1500" dirty="0"/>
+          </a:p>
+          <a:p>
+            <a:pPr marL="342900" indent="-342900">
+              <a:spcAft>
+                <a:spcPts val="1000"/>
+              </a:spcAft>
+              <a:buSzPct val="100000"/>
+              <a:buChar char="•"/>
+            </a:pPr>
+            <a:r>
+              <a:rPr lang="en-US" sz="1500" dirty="0">
+                <a:solidFill>
+                  <a:schemeClr val="tx1"/>
+                </a:solidFill>
+              </a:rPr>
+              <a:t>微調模型跑同一份題目，跟線上那一套放在同一張表比較</a:t>
+            </a:r>
+            <a:endParaRPr lang="en-US" sz="1500" dirty="0"/>
+          </a:p>
+          <a:p>
+            <a:pPr marL="342900" indent="-342900">
+              <a:spcAft>
+                <a:spcPts val="1000"/>
+              </a:spcAft>
+              <a:buSzPct val="100000"/>
+              <a:buChar char="•"/>
+            </a:pPr>
+            <a:r>
+              <a:rPr lang="en-US" sz="1500" dirty="0">
+                <a:solidFill>
+                  <a:schemeClr val="tx1"/>
+                </a:solidFill>
+              </a:rPr>
+              <a:t>建議加上「跟上個月比」的趨勢敘述（數字一樣由資料庫先算）</a:t>
+            </a:r>
+            <a:endParaRPr lang="en-US" sz="1500" dirty="0"/>
+          </a:p>
+          <a:p>
+            <a:pPr marL="342900" indent="-342900">
+              <a:spcAft>
+                <a:spcPts val="1000"/>
+              </a:spcAft>
+              <a:buSzPct val="100000"/>
+              <a:buChar char="•"/>
+            </a:pPr>
+            <a:r>
+              <a:rPr lang="en-US" sz="1500" dirty="0">
+                <a:solidFill>
+                  <a:schemeClr val="tx1"/>
+                </a:solidFill>
+              </a:rPr>
+              <a:t>家庭改成開放式（下一頁）</a:t>
+            </a:r>
+            <a:endParaRPr lang="en-US" sz="1500" dirty="0"/>
+          </a:p>
+        </p:txBody>
+      </p:sp>
+      <p:sp>
+        <p:nvSpPr>
+          <p:cNvPr id="25" name="Slide Number Placeholder 0"/>
+          <p:cNvSpPr>
+            <a:spLocks noGrp="1"/>
+          </p:cNvSpPr>
+          <p:nvPr>
+            <p:ph type="sldNum" sz="quarter" idx="4294967295"/>
+          </p:nvPr>
+        </p:nvSpPr>
+        <p:spPr>
+          <a:xfrm>
+            <a:off x="11201400" y="6419088"/>
+            <a:ext cx="457200" cy="274320"/>
+          </a:xfrm>
+          <a:prstGeom prst="rect">
+            <a:avLst/>
+          </a:prstGeom>
+          <a:extLst>
+            <a:ext uri="{C572A759-6A51-4108-AA02-DFA0A04FC94B}">
+              <ma14:wrappingTextBoxFlag xmlns:ma14="http://schemas.microsoft.com/office/mac/drawingml/2011/main" val="0"/>
+            </a:ext>
+          </a:extLst>
+        </p:spPr>
+        <p:txBody>
+          <a:bodyPr/>
+          <a:lstStyle>
+            <a:lvl1pPr>
+              <a:defRPr sz="1000">
+                <a:solidFill>
+                  <a:schemeClr val="accent5"/>
+                </a:solidFill>
+              </a:defRPr>
+            </a:lvl1pPr>
+          </a:lstStyle>
+          <a:p>
+            <a:pPr algn="r"/>
+            <a:fld id="{F7021451-1387-4CA6-816F-3879F97B5CBC}" type="slidenum">
+              <a:rPr b="0" lang="en-US"/>
+              <a:t>23</a:t>
+            </a:fld>
+            <a:endParaRPr lang="en-US"/>
+          </a:p>
+        </p:txBody>
+      </p:sp>
+    </p:spTree>
+  </p:cSld>
+  <p:clrMapOvr>
+    <a:masterClrMapping/>
+  </p:clrMapOvr>
+</p:sld>
+</file>
+
+<file path=ppt/slides/slide24.xml><?xml version="1.0" encoding="utf-8"?>
+<p:sld xmlns:a="http://schemas.openxmlformats.org/drawingml/2006/main" xmlns:r="http://schemas.openxmlformats.org/officeDocument/2006/relationships" xmlns:p="http://schemas.openxmlformats.org/presentationml/2006/main">
+  <p:cSld name="Slide 24">
+    <p:spTree>
+      <p:nvGrpSpPr>
+        <p:cNvPr id="1" name=""/>
+        <p:cNvGrpSpPr/>
+        <p:nvPr/>
+      </p:nvGrpSpPr>
+      <p:grpSpPr>
+        <a:xfrm>
+          <a:off x="0" y="0"/>
+          <a:ext cx="0" cy="0"/>
+          <a:chOff x="0" y="0"/>
+          <a:chExt cx="0" cy="0"/>
+        </a:xfrm>
+      </p:grpSpPr>
+      <p:sp>
+        <p:nvSpPr>
+          <p:cNvPr id="2" name="Text 0"/>
+          <p:cNvSpPr/>
+          <p:nvPr>
+            <p:ph idx="100" type="title" hasCustomPrompt="1"/>
+          </p:nvPr>
+        </p:nvSpPr>
+        <p:spPr>
+          <a:xfrm>
+            <a:off x="548640" y="320040"/>
+            <a:ext cx="11064240" cy="731520"/>
+          </a:xfrm>
+          <a:prstGeom prst="rect">
+            <a:avLst/>
+          </a:prstGeom>
+          <a:noFill/>
+          <a:ln/>
+        </p:spPr>
+        <p:txBody>
+          <a:bodyPr wrap="square" lIns="0" tIns="0" rIns="0" bIns="0" rtlCol="0" anchor="ctr"/>
+          <a:lstStyle/>
+          <a:p>
+            <a:pPr algn="l" indent="0" marL="0">
+              <a:buNone/>
+            </a:pPr>
+            <a:r>
+              <a:rPr lang="en-US" sz="3200" b="1" dirty="0">
+                <a:solidFill>
+                  <a:schemeClr val="tx2"/>
+                </a:solidFill>
+              </a:rPr>
+              <a:t>下一版：從「照看子女」改成開放式家庭</a:t>
+            </a:r>
+            <a:endParaRPr lang="en-US" sz="3200" dirty="0"/>
+          </a:p>
+        </p:txBody>
+      </p:sp>
+      <p:sp>
+        <p:nvSpPr>
+          <p:cNvPr id="3" name="redo-0"/>
+          <p:cNvSpPr/>
+          <p:nvPr/>
+        </p:nvSpPr>
+        <p:spPr>
+          <a:xfrm>
+            <a:off x="548640" y="1371600"/>
+            <a:ext cx="11064240" cy="822960"/>
+          </a:xfrm>
+          <a:prstGeom prst="roundRect">
+            <a:avLst>
+              <a:gd name="adj" fmla="val 15556"/>
+            </a:avLst>
+          </a:prstGeom>
+          <a:solidFill>
+            <a:schemeClr val="bg2"/>
+          </a:solidFill>
+          <a:ln w="12700">
+            <a:solidFill>
+              <a:schemeClr val="bg2"/>
+            </a:solidFill>
+            <a:prstDash val="solid"/>
+          </a:ln>
+        </p:spPr>
+      </p:sp>
+      <p:sp>
+        <p:nvSpPr>
+          <p:cNvPr id="4" name="redo-ic-0-circle"/>
+          <p:cNvSpPr/>
+          <p:nvPr/>
+        </p:nvSpPr>
+        <p:spPr>
+          <a:xfrm>
+            <a:off x="731520" y="1508760"/>
+            <a:ext cx="548640" cy="548640"/>
+          </a:xfrm>
+          <a:prstGeom prst="ellipse">
+            <a:avLst/>
+          </a:prstGeom>
+          <a:solidFill>
+            <a:schemeClr val="accent1"/>
+          </a:solidFill>
+          <a:ln w="12700">
+            <a:solidFill>
+              <a:schemeClr val="accent1"/>
+            </a:solidFill>
+            <a:prstDash val="solid"/>
+          </a:ln>
+        </p:spPr>
+      </p:sp>
+      <p:pic>
+        <p:nvPicPr>
+          <p:cNvPr id="5" name="redo-ic-0-icon" descr="preencoded.png">    </p:cNvPr>
+          <p:cNvPicPr>
+            <a:picLocks noChangeAspect="1"/>
+          </p:cNvPicPr>
+          <p:nvPr/>
+        </p:nvPicPr>
+        <p:blipFill>
+          <a:blip r:embed="rId1"/>
+          <a:stretch>
+            <a:fillRect/>
+          </a:stretch>
+        </p:blipFill>
+        <p:spPr>
+          <a:xfrm>
+            <a:off x="874166" y="1651406"/>
+            <a:ext cx="263347" cy="263347"/>
+          </a:xfrm>
+          <a:prstGeom prst="rect">
+            <a:avLst/>
+          </a:prstGeom>
+        </p:spPr>
+      </p:pic>
+      <p:sp>
+        <p:nvSpPr>
+          <p:cNvPr id="6" name="Text 3"/>
+          <p:cNvSpPr txBox="1"/>
+          <p:nvPr/>
+        </p:nvSpPr>
+        <p:spPr>
+          <a:xfrm>
+            <a:off x="1463040" y="1463040"/>
+            <a:ext cx="2926080" cy="640080"/>
+          </a:xfrm>
+          <a:prstGeom prst="rect">
+            <a:avLst/>
+          </a:prstGeom>
+          <a:noFill/>
+          <a:ln/>
+        </p:spPr>
+        <p:txBody>
+          <a:bodyPr wrap="square" lIns="0" tIns="0" rIns="0" bIns="0" rtlCol="0" anchor="ctr"/>
+          <a:lstStyle/>
+          <a:p>
+            <a:pPr indent="0" marL="0">
+              <a:buNone/>
+            </a:pPr>
+            <a:r>
+              <a:rPr lang="en-US" sz="1700" b="1" dirty="0">
+                <a:solidFill>
+                  <a:schemeClr val="tx2"/>
+                </a:solidFill>
+              </a:rPr>
+              <a:t>成員一律平等</a:t>
+            </a:r>
+            <a:endParaRPr lang="en-US" sz="1700" dirty="0"/>
+          </a:p>
+        </p:txBody>
+      </p:sp>
+      <p:sp>
+        <p:nvSpPr>
+          <p:cNvPr id="7" name="Text 4"/>
+          <p:cNvSpPr txBox="1"/>
+          <p:nvPr/>
+        </p:nvSpPr>
+        <p:spPr>
+          <a:xfrm>
+            <a:off x="4389120" y="1444752"/>
+            <a:ext cx="7040880" cy="676656"/>
+          </a:xfrm>
+          <a:prstGeom prst="rect">
+            <a:avLst/>
+          </a:prstGeom>
+          <a:noFill/>
+          <a:ln/>
+        </p:spPr>
+        <p:txBody>
+          <a:bodyPr wrap="square" lIns="0" tIns="0" rIns="0" bIns="0" rtlCol="0" anchor="ctr"/>
+          <a:lstStyle/>
+          <a:p>
+            <a:pPr indent="0" marL="0">
+              <a:buNone/>
+            </a:pPr>
+            <a:r>
+              <a:rPr lang="en-US" sz="1300" dirty="0">
+                <a:solidFill>
+                  <a:schemeClr val="tx1"/>
+                </a:solidFill>
+              </a:rPr>
+              <a:t>拿掉家長／子女與照看、零用金；誰看得到我的帳由我自己決定。動到別人的資料要輸入自己的密碼</a:t>
+            </a:r>
+            <a:endParaRPr lang="en-US" sz="1300" dirty="0"/>
+          </a:p>
+        </p:txBody>
+      </p:sp>
+      <p:sp>
+        <p:nvSpPr>
+          <p:cNvPr id="8" name="redo-1"/>
+          <p:cNvSpPr/>
+          <p:nvPr/>
+        </p:nvSpPr>
+        <p:spPr>
+          <a:xfrm>
+            <a:off x="548640" y="2304288"/>
+            <a:ext cx="11064240" cy="822960"/>
+          </a:xfrm>
+          <a:prstGeom prst="roundRect">
+            <a:avLst>
+              <a:gd name="adj" fmla="val 15556"/>
+            </a:avLst>
+          </a:prstGeom>
+          <a:solidFill>
+            <a:schemeClr val="bg2"/>
+          </a:solidFill>
+          <a:ln w="12700">
+            <a:solidFill>
+              <a:schemeClr val="bg2"/>
+            </a:solidFill>
+            <a:prstDash val="solid"/>
+          </a:ln>
+        </p:spPr>
+      </p:sp>
+      <p:sp>
+        <p:nvSpPr>
+          <p:cNvPr id="9" name="redo-ic-1-circle"/>
+          <p:cNvSpPr/>
+          <p:nvPr/>
+        </p:nvSpPr>
+        <p:spPr>
+          <a:xfrm>
+            <a:off x="731520" y="2441448"/>
+            <a:ext cx="548640" cy="548640"/>
+          </a:xfrm>
+          <a:prstGeom prst="ellipse">
+            <a:avLst/>
+          </a:prstGeom>
+          <a:solidFill>
+            <a:schemeClr val="accent2"/>
+          </a:solidFill>
+          <a:ln w="12700">
+            <a:solidFill>
+              <a:schemeClr val="accent2"/>
+            </a:solidFill>
+            <a:prstDash val="solid"/>
+          </a:ln>
+        </p:spPr>
+      </p:sp>
+      <p:pic>
+        <p:nvPicPr>
+          <p:cNvPr id="10" name="redo-ic-1-icon" descr="preencoded.png">    </p:cNvPr>
+          <p:cNvPicPr>
+            <a:picLocks noChangeAspect="1"/>
+          </p:cNvPicPr>
+          <p:nvPr/>
+        </p:nvPicPr>
+        <p:blipFill>
+          <a:blip r:embed="rId2"/>
+          <a:stretch>
+            <a:fillRect/>
+          </a:stretch>
+        </p:blipFill>
+        <p:spPr>
+          <a:xfrm>
+            <a:off x="874166" y="2584094"/>
+            <a:ext cx="263347" cy="263347"/>
+          </a:xfrm>
+          <a:prstGeom prst="rect">
+            <a:avLst/>
+          </a:prstGeom>
+        </p:spPr>
+      </p:pic>
+      <p:sp>
+        <p:nvSpPr>
+          <p:cNvPr id="11" name="Text 7"/>
+          <p:cNvSpPr txBox="1"/>
+          <p:nvPr/>
+        </p:nvSpPr>
+        <p:spPr>
+          <a:xfrm>
+            <a:off x="1463040" y="2395728"/>
+            <a:ext cx="2926080" cy="640080"/>
+          </a:xfrm>
+          <a:prstGeom prst="rect">
+            <a:avLst/>
+          </a:prstGeom>
+          <a:noFill/>
+          <a:ln/>
+        </p:spPr>
+        <p:txBody>
+          <a:bodyPr wrap="square" lIns="0" tIns="0" rIns="0" bIns="0" rtlCol="0" anchor="ctr"/>
+          <a:lstStyle/>
+          <a:p>
+            <a:pPr indent="0" marL="0">
+              <a:buNone/>
+            </a:pPr>
+            <a:r>
+              <a:rPr lang="en-US" sz="1700" b="1" dirty="0">
+                <a:solidFill>
+                  <a:schemeClr val="tx2"/>
+                </a:solidFill>
+              </a:rPr>
+              <a:t>個人／家庭兩種模式</a:t>
+            </a:r>
+            <a:endParaRPr lang="en-US" sz="1700" dirty="0"/>
+          </a:p>
+        </p:txBody>
+      </p:sp>
+      <p:sp>
+        <p:nvSpPr>
+          <p:cNvPr id="12" name="Text 8"/>
+          <p:cNvSpPr txBox="1"/>
+          <p:nvPr/>
+        </p:nvSpPr>
+        <p:spPr>
+          <a:xfrm>
+            <a:off x="4389120" y="2377440"/>
+            <a:ext cx="7040880" cy="676656"/>
+          </a:xfrm>
+          <a:prstGeom prst="rect">
+            <a:avLst/>
+          </a:prstGeom>
+          <a:noFill/>
+          <a:ln/>
+        </p:spPr>
+        <p:txBody>
+          <a:bodyPr wrap="square" lIns="0" tIns="0" rIns="0" bIns="0" rtlCol="0" anchor="ctr"/>
+          <a:lstStyle/>
+          <a:p>
+            <a:pPr indent="0" marL="0">
+              <a:buNone/>
+            </a:pPr>
+            <a:r>
+              <a:rPr lang="en-US" sz="1300" dirty="0">
+                <a:solidFill>
+                  <a:schemeClr val="tx1"/>
+                </a:solidFill>
+              </a:rPr>
+              <a:t>功能一樣、各有基底與帳本；家庭的明細來自每個人自己選擇「併進家庭」的，個人照算、家庭也算</a:t>
+            </a:r>
+            <a:endParaRPr lang="en-US" sz="1300" dirty="0"/>
+          </a:p>
+        </p:txBody>
+      </p:sp>
+      <p:sp>
+        <p:nvSpPr>
+          <p:cNvPr id="13" name="redo-2"/>
+          <p:cNvSpPr/>
+          <p:nvPr/>
+        </p:nvSpPr>
+        <p:spPr>
+          <a:xfrm>
+            <a:off x="548640" y="3236976"/>
+            <a:ext cx="11064240" cy="822960"/>
+          </a:xfrm>
+          <a:prstGeom prst="roundRect">
+            <a:avLst>
+              <a:gd name="adj" fmla="val 15556"/>
+            </a:avLst>
+          </a:prstGeom>
+          <a:solidFill>
+            <a:schemeClr val="bg2"/>
+          </a:solidFill>
+          <a:ln w="12700">
+            <a:solidFill>
+              <a:schemeClr val="bg2"/>
+            </a:solidFill>
+            <a:prstDash val="solid"/>
+          </a:ln>
+        </p:spPr>
+      </p:sp>
+      <p:sp>
+        <p:nvSpPr>
+          <p:cNvPr id="14" name="redo-ic-2-circle"/>
+          <p:cNvSpPr/>
+          <p:nvPr/>
+        </p:nvSpPr>
+        <p:spPr>
+          <a:xfrm>
+            <a:off x="731520" y="3374136"/>
+            <a:ext cx="548640" cy="548640"/>
+          </a:xfrm>
+          <a:prstGeom prst="ellipse">
+            <a:avLst/>
+          </a:prstGeom>
+          <a:solidFill>
+            <a:schemeClr val="accent3"/>
+          </a:solidFill>
+          <a:ln w="12700">
+            <a:solidFill>
+              <a:schemeClr val="accent3"/>
+            </a:solidFill>
+            <a:prstDash val="solid"/>
+          </a:ln>
+        </p:spPr>
+      </p:sp>
+      <p:pic>
+        <p:nvPicPr>
+          <p:cNvPr id="15" name="redo-ic-2-icon" descr="preencoded.png">    </p:cNvPr>
+          <p:cNvPicPr>
+            <a:picLocks noChangeAspect="1"/>
+          </p:cNvPicPr>
+          <p:nvPr/>
+        </p:nvPicPr>
+        <p:blipFill>
+          <a:blip r:embed="rId3"/>
+          <a:stretch>
+            <a:fillRect/>
+          </a:stretch>
+        </p:blipFill>
+        <p:spPr>
+          <a:xfrm>
+            <a:off x="874166" y="3516782"/>
+            <a:ext cx="263347" cy="263347"/>
+          </a:xfrm>
+          <a:prstGeom prst="rect">
+            <a:avLst/>
+          </a:prstGeom>
+        </p:spPr>
+      </p:pic>
+      <p:sp>
+        <p:nvSpPr>
+          <p:cNvPr id="16" name="Text 11"/>
+          <p:cNvSpPr txBox="1"/>
+          <p:nvPr/>
+        </p:nvSpPr>
+        <p:spPr>
+          <a:xfrm>
+            <a:off x="1463040" y="3328416"/>
+            <a:ext cx="2926080" cy="640080"/>
+          </a:xfrm>
+          <a:prstGeom prst="rect">
+            <a:avLst/>
+          </a:prstGeom>
+          <a:noFill/>
+          <a:ln/>
+        </p:spPr>
+        <p:txBody>
+          <a:bodyPr wrap="square" lIns="0" tIns="0" rIns="0" bIns="0" rtlCol="0" anchor="ctr"/>
+          <a:lstStyle/>
+          <a:p>
+            <a:pPr indent="0" marL="0">
+              <a:buNone/>
+            </a:pPr>
+            <a:r>
+              <a:rPr lang="en-US" sz="1700" b="1" dirty="0">
+                <a:solidFill>
+                  <a:schemeClr val="tx2"/>
+                </a:solidFill>
+              </a:rPr>
+              <a:t>家庭的初始化設定</a:t>
+            </a:r>
+            <a:endParaRPr lang="en-US" sz="1700" dirty="0"/>
+          </a:p>
+        </p:txBody>
+      </p:sp>
+      <p:sp>
+        <p:nvSpPr>
+          <p:cNvPr id="17" name="Text 12"/>
+          <p:cNvSpPr txBox="1"/>
+          <p:nvPr/>
+        </p:nvSpPr>
+        <p:spPr>
+          <a:xfrm>
+            <a:off x="4389120" y="3310128"/>
+            <a:ext cx="7040880" cy="676656"/>
+          </a:xfrm>
+          <a:prstGeom prst="rect">
+            <a:avLst/>
+          </a:prstGeom>
+          <a:noFill/>
+          <a:ln/>
+        </p:spPr>
+        <p:txBody>
+          <a:bodyPr wrap="square" lIns="0" tIns="0" rIns="0" bIns="0" rtlCol="0" anchor="ctr"/>
+          <a:lstStyle/>
+          <a:p>
+            <a:pPr indent="0" marL="0">
+              <a:buNone/>
+            </a:pPr>
+            <a:r>
+              <a:rPr lang="en-US" sz="1300" dirty="0">
+                <a:solidFill>
+                  <a:schemeClr val="tx1"/>
+                </a:solidFill>
+              </a:rPr>
+              <a:t>建立的人先填家庭想存多少、收入怎麼估；AI 建議也能針對全家產生。家庭模式的主題每個人自己選</a:t>
+            </a:r>
+            <a:endParaRPr lang="en-US" sz="1300" dirty="0"/>
+          </a:p>
+        </p:txBody>
+      </p:sp>
+      <p:sp>
+        <p:nvSpPr>
+          <p:cNvPr id="18" name="redo-3"/>
+          <p:cNvSpPr/>
+          <p:nvPr/>
+        </p:nvSpPr>
+        <p:spPr>
+          <a:xfrm>
+            <a:off x="548640" y="4169664"/>
+            <a:ext cx="11064240" cy="822960"/>
+          </a:xfrm>
+          <a:prstGeom prst="roundRect">
+            <a:avLst>
+              <a:gd name="adj" fmla="val 15556"/>
+            </a:avLst>
+          </a:prstGeom>
+          <a:solidFill>
+            <a:schemeClr val="bg2"/>
+          </a:solidFill>
+          <a:ln w="12700">
+            <a:solidFill>
+              <a:schemeClr val="bg2"/>
+            </a:solidFill>
+            <a:prstDash val="solid"/>
+          </a:ln>
+        </p:spPr>
+      </p:sp>
+      <p:sp>
+        <p:nvSpPr>
+          <p:cNvPr id="19" name="redo-ic-3-circle"/>
+          <p:cNvSpPr/>
+          <p:nvPr/>
+        </p:nvSpPr>
+        <p:spPr>
+          <a:xfrm>
+            <a:off x="731520" y="4306824"/>
+            <a:ext cx="548640" cy="548640"/>
+          </a:xfrm>
+          <a:prstGeom prst="ellipse">
+            <a:avLst/>
+          </a:prstGeom>
+          <a:solidFill>
+            <a:schemeClr val="accent1"/>
+          </a:solidFill>
+          <a:ln w="12700">
+            <a:solidFill>
+              <a:schemeClr val="accent1"/>
+            </a:solidFill>
+            <a:prstDash val="solid"/>
+          </a:ln>
+        </p:spPr>
+      </p:sp>
+      <p:pic>
+        <p:nvPicPr>
+          <p:cNvPr id="20" name="redo-ic-3-icon" descr="preencoded.png">    </p:cNvPr>
+          <p:cNvPicPr>
+            <a:picLocks noChangeAspect="1"/>
+          </p:cNvPicPr>
+          <p:nvPr/>
+        </p:nvPicPr>
+        <p:blipFill>
+          <a:blip r:embed="rId4"/>
+          <a:stretch>
+            <a:fillRect/>
+          </a:stretch>
+        </p:blipFill>
+        <p:spPr>
+          <a:xfrm>
+            <a:off x="874166" y="4449470"/>
+            <a:ext cx="263347" cy="263347"/>
+          </a:xfrm>
+          <a:prstGeom prst="rect">
+            <a:avLst/>
+          </a:prstGeom>
+        </p:spPr>
+      </p:pic>
+      <p:sp>
+        <p:nvSpPr>
+          <p:cNvPr id="21" name="Text 15"/>
+          <p:cNvSpPr txBox="1"/>
+          <p:nvPr/>
+        </p:nvSpPr>
+        <p:spPr>
+          <a:xfrm>
+            <a:off x="1463040" y="4261104"/>
+            <a:ext cx="2926080" cy="640080"/>
+          </a:xfrm>
+          <a:prstGeom prst="rect">
+            <a:avLst/>
+          </a:prstGeom>
+          <a:noFill/>
+          <a:ln/>
+        </p:spPr>
+        <p:txBody>
+          <a:bodyPr wrap="square" lIns="0" tIns="0" rIns="0" bIns="0" rtlCol="0" anchor="ctr"/>
+          <a:lstStyle/>
+          <a:p>
+            <a:pPr indent="0" marL="0">
+              <a:buNone/>
+            </a:pPr>
+            <a:r>
+              <a:rPr lang="en-US" sz="1700" b="1" dirty="0">
+                <a:solidFill>
+                  <a:schemeClr val="tx2"/>
+                </a:solidFill>
+              </a:rPr>
+              <a:t>帳本只剩合併與刪除</a:t>
+            </a:r>
+            <a:endParaRPr lang="en-US" sz="1700" dirty="0"/>
+          </a:p>
+        </p:txBody>
+      </p:sp>
+      <p:sp>
+        <p:nvSpPr>
+          <p:cNvPr id="22" name="Text 16"/>
+          <p:cNvSpPr txBox="1"/>
+          <p:nvPr/>
+        </p:nvSpPr>
+        <p:spPr>
+          <a:xfrm>
+            <a:off x="4389120" y="4242816"/>
+            <a:ext cx="7040880" cy="676656"/>
+          </a:xfrm>
+          <a:prstGeom prst="rect">
+            <a:avLst/>
+          </a:prstGeom>
+          <a:noFill/>
+          <a:ln/>
+        </p:spPr>
+        <p:txBody>
+          <a:bodyPr wrap="square" lIns="0" tIns="0" rIns="0" bIns="0" rtlCol="0" anchor="ctr"/>
+          <a:lstStyle/>
+          <a:p>
+            <a:pPr indent="0" marL="0">
+              <a:buNone/>
+            </a:pPr>
+            <a:r>
+              <a:rPr lang="en-US" sz="1300" dirty="0">
+                <a:solidFill>
+                  <a:schemeClr val="tx1"/>
+                </a:solidFill>
+              </a:rPr>
+              <a:t>一顆「開一本帳」；活動帳本可設存錢目標（綠光）、花費上限（紅光）與到期日，到期可合併或延長</a:t>
+            </a:r>
+            <a:endParaRPr lang="en-US" sz="1300" dirty="0"/>
+          </a:p>
+        </p:txBody>
+      </p:sp>
+      <p:sp>
+        <p:nvSpPr>
+          <p:cNvPr id="23" name="redo-4"/>
+          <p:cNvSpPr/>
+          <p:nvPr/>
+        </p:nvSpPr>
+        <p:spPr>
+          <a:xfrm>
+            <a:off x="548640" y="5102352"/>
+            <a:ext cx="11064240" cy="822960"/>
+          </a:xfrm>
+          <a:prstGeom prst="roundRect">
+            <a:avLst>
+              <a:gd name="adj" fmla="val 15556"/>
+            </a:avLst>
+          </a:prstGeom>
+          <a:solidFill>
+            <a:schemeClr val="bg2"/>
+          </a:solidFill>
+          <a:ln w="12700">
+            <a:solidFill>
+              <a:schemeClr val="bg2"/>
+            </a:solidFill>
+            <a:prstDash val="solid"/>
+          </a:ln>
+        </p:spPr>
+      </p:sp>
+      <p:sp>
+        <p:nvSpPr>
+          <p:cNvPr id="24" name="redo-ic-4-circle"/>
+          <p:cNvSpPr/>
+          <p:nvPr/>
+        </p:nvSpPr>
+        <p:spPr>
+          <a:xfrm>
+            <a:off x="731520" y="5239512"/>
+            <a:ext cx="548640" cy="548640"/>
+          </a:xfrm>
+          <a:prstGeom prst="ellipse">
+            <a:avLst/>
+          </a:prstGeom>
+          <a:solidFill>
+            <a:schemeClr val="accent2"/>
+          </a:solidFill>
+          <a:ln w="12700">
+            <a:solidFill>
+              <a:schemeClr val="accent2"/>
+            </a:solidFill>
+            <a:prstDash val="solid"/>
+          </a:ln>
+        </p:spPr>
+      </p:sp>
+      <p:pic>
+        <p:nvPicPr>
+          <p:cNvPr id="25" name="redo-ic-4-icon" descr="preencoded.png">    </p:cNvPr>
+          <p:cNvPicPr>
+            <a:picLocks noChangeAspect="1"/>
+          </p:cNvPicPr>
+          <p:nvPr/>
+        </p:nvPicPr>
+        <p:blipFill>
+          <a:blip r:embed="rId5"/>
+          <a:stretch>
+            <a:fillRect/>
+          </a:stretch>
+        </p:blipFill>
+        <p:spPr>
+          <a:xfrm>
+            <a:off x="874166" y="5382158"/>
+            <a:ext cx="263347" cy="263347"/>
+          </a:xfrm>
+          <a:prstGeom prst="rect">
+            <a:avLst/>
+          </a:prstGeom>
+        </p:spPr>
+      </p:pic>
+      <p:sp>
+        <p:nvSpPr>
+          <p:cNvPr id="26" name="Text 19"/>
+          <p:cNvSpPr txBox="1"/>
+          <p:nvPr/>
+        </p:nvSpPr>
+        <p:spPr>
+          <a:xfrm>
+            <a:off x="1463040" y="5193792"/>
+            <a:ext cx="2926080" cy="640080"/>
+          </a:xfrm>
+          <a:prstGeom prst="rect">
+            <a:avLst/>
+          </a:prstGeom>
+          <a:noFill/>
+          <a:ln/>
+        </p:spPr>
+        <p:txBody>
+          <a:bodyPr wrap="square" lIns="0" tIns="0" rIns="0" bIns="0" rtlCol="0" anchor="ctr"/>
+          <a:lstStyle/>
+          <a:p>
+            <a:pPr indent="0" marL="0">
+              <a:buNone/>
+            </a:pPr>
+            <a:r>
+              <a:rPr lang="en-US" sz="1700" b="1" dirty="0">
+                <a:solidFill>
+                  <a:schemeClr val="tx2"/>
+                </a:solidFill>
+              </a:rPr>
+              <a:t>每月自動打包</a:t>
+            </a:r>
+            <a:endParaRPr lang="en-US" sz="1700" dirty="0"/>
+          </a:p>
+        </p:txBody>
+      </p:sp>
+      <p:sp>
+        <p:nvSpPr>
+          <p:cNvPr id="27" name="Text 20"/>
+          <p:cNvSpPr txBox="1"/>
+          <p:nvPr/>
+        </p:nvSpPr>
+        <p:spPr>
+          <a:xfrm>
+            <a:off x="4389120" y="5175504"/>
+            <a:ext cx="7040880" cy="676656"/>
+          </a:xfrm>
+          <a:prstGeom prst="rect">
+            <a:avLst/>
+          </a:prstGeom>
+          <a:noFill/>
+          <a:ln/>
+        </p:spPr>
+        <p:txBody>
+          <a:bodyPr wrap="square" lIns="0" tIns="0" rIns="0" bIns="0" rtlCol="0" anchor="ctr"/>
+          <a:lstStyle/>
+          <a:p>
+            <a:pPr indent="0" marL="0">
+              <a:buNone/>
+            </a:pPr>
+            <a:r>
+              <a:rPr lang="en-US" sz="1300" dirty="0">
+                <a:solidFill>
+                  <a:schemeClr val="tx1"/>
+                </a:solidFill>
+              </a:rPr>
+              <a:t>過去的月份收成一包：筆數、收入、支出合計，點開才看每一筆</a:t>
+            </a:r>
+            <a:endParaRPr lang="en-US" sz="1300" dirty="0"/>
+          </a:p>
+        </p:txBody>
+      </p:sp>
+      <p:sp>
+        <p:nvSpPr>
+          <p:cNvPr id="25" name="Slide Number Placeholder 0"/>
+          <p:cNvSpPr>
+            <a:spLocks noGrp="1"/>
+          </p:cNvSpPr>
+          <p:nvPr>
+            <p:ph type="sldNum" sz="quarter" idx="4294967295"/>
+          </p:nvPr>
+        </p:nvSpPr>
+        <p:spPr>
+          <a:xfrm>
+            <a:off x="11201400" y="6419088"/>
+            <a:ext cx="457200" cy="274320"/>
+          </a:xfrm>
+          <a:prstGeom prst="rect">
+            <a:avLst/>
+          </a:prstGeom>
+          <a:extLst>
+            <a:ext uri="{C572A759-6A51-4108-AA02-DFA0A04FC94B}">
+              <ma14:wrappingTextBoxFlag xmlns:ma14="http://schemas.microsoft.com/office/mac/drawingml/2011/main" val="0"/>
+            </a:ext>
+          </a:extLst>
+        </p:spPr>
+        <p:txBody>
+          <a:bodyPr/>
+          <a:lstStyle>
+            <a:lvl1pPr>
+              <a:defRPr sz="1000">
+                <a:solidFill>
+                  <a:schemeClr val="accent5"/>
+                </a:solidFill>
+              </a:defRPr>
+            </a:lvl1pPr>
+          </a:lstStyle>
+          <a:p>
+            <a:pPr algn="r"/>
+            <a:fld id="{F7021451-1387-4CA6-816F-3879F97B5CBC}" type="slidenum">
+              <a:rPr b="0" lang="en-US"/>
+              <a:t>24</a:t>
+            </a:fld>
+            <a:endParaRPr lang="en-US"/>
+          </a:p>
+        </p:txBody>
+      </p:sp>
+    </p:spTree>
+  </p:cSld>
+  <p:clrMapOvr>
+    <a:masterClrMapping/>
+  </p:clrMapOvr>
+</p:sld>
+</file>
+
+<file path=ppt/slides/slide25.xml><?xml version="1.0" encoding="utf-8"?>
+<p:sld xmlns:a="http://schemas.openxmlformats.org/drawingml/2006/main" xmlns:r="http://schemas.openxmlformats.org/officeDocument/2006/relationships" xmlns:p="http://schemas.openxmlformats.org/presentationml/2006/main">
+  <p:cSld name="Slide 25">
+    <p:spTree>
+      <p:nvGrpSpPr>
+        <p:cNvPr id="1" name=""/>
+        <p:cNvGrpSpPr/>
+        <p:nvPr/>
+      </p:nvGrpSpPr>
+      <p:grpSpPr>
+        <a:xfrm>
+          <a:off x="0" y="0"/>
+          <a:ext cx="0" cy="0"/>
+          <a:chOff x="0" y="0"/>
+          <a:chExt cx="0" cy="0"/>
+        </a:xfrm>
+      </p:grpSpPr>
+      <p:sp>
+        <p:nvSpPr>
+          <p:cNvPr id="2" name="Text 0"/>
+          <p:cNvSpPr/>
+          <p:nvPr>
+            <p:ph idx="100" type="title" hasCustomPrompt="1"/>
+          </p:nvPr>
+        </p:nvSpPr>
+        <p:spPr>
+          <a:xfrm>
             <a:off x="822960" y="1828800"/>
             <a:ext cx="10515600" cy="1188720"/>
           </a:xfrm>
@@ -18618,7 +20417,7 @@
                 <a:ea typeface="Calibri" pitchFamily="34" charset="-122"/>
                 <a:cs typeface="Calibri" pitchFamily="34" charset="-120"/>
               </a:rPr>
-              <a:t>833</a:t>
+              <a:t>850</a:t>
             </a:r>
             <a:endParaRPr lang="en-US" sz="4800" dirty="0"/>
           </a:p>
@@ -18756,7 +20555,7 @@
                 <a:ea typeface="Calibri" pitchFamily="34" charset="-122"/>
                 <a:cs typeface="Calibri" pitchFamily="34" charset="-120"/>
               </a:rPr>
-              <a:t>95/95</a:t>
+              <a:t>96/96</a:t>
             </a:r>
             <a:endParaRPr lang="en-US" sz="4800" dirty="0"/>
           </a:p>

--- a/report/家庭記帳_期末報告.pptx
+++ b/report/家庭記帳_期末報告.pptx
@@ -131,14 +131,14 @@
   <p:extLst>
     <p:ext uri="{521415D9-36F7-43E2-AB2F-B90AF26B5E84}">
       <p14:sectionLst xmlns:p14="http://schemas.microsoft.com/office/powerpoint/2010/main">
-        <p14:section name="開場" id="{74448a68-f626-bb8c-fa47-b3c95b2e4204}">
+        <p14:section name="開場" id="{15f07026-e89f-a092-0994-95512ea13075}">
           <p14:sldIdLst>
             <p14:sldId id="256"/>
             <p14:sldId id="257"/>
             <p14:sldId id="258"/>
           </p14:sldIdLst>
         </p14:section>
-        <p14:section name="系統" id="{aab9eb70-5c26-444b-8025-3af714f701a9}">
+        <p14:section name="系統" id="{2c68f4b0-0536-ec4d-4f89-362efdc75e4b}">
           <p14:sldIdLst>
             <p14:sldId id="259"/>
             <p14:sldId id="260"/>
@@ -149,7 +149,7 @@
             <p14:sldId id="265"/>
           </p14:sldIdLst>
         </p14:section>
-        <p14:section name="AI 功能" id="{2c9c68f3-ef50-3fd6-68af-17ecd6fd6d51}">
+        <p14:section name="AI 功能" id="{4a794e0b-8ba4-6d90-35e7-0e0aa3adf867}">
           <p14:sldIdLst>
             <p14:sldId id="266"/>
             <p14:sldId id="267"/>
@@ -158,7 +158,7 @@
             <p14:sldId id="270"/>
           </p14:sldIdLst>
         </p14:section>
-        <p14:section name="評測與測試" id="{c49c79de-03b9-aee1-8c19-3df6cf46b8b7}">
+        <p14:section name="評測與測試" id="{1c9c6f4d-b543-fc5d-6b40-4cfae8241d45}">
           <p14:sldIdLst>
             <p14:sldId id="271"/>
             <p14:sldId id="272"/>
@@ -169,7 +169,7 @@
             <p14:sldId id="277"/>
           </p14:sldIdLst>
         </p14:section>
-        <p14:section name="結語" id="{fcd82673-5660-f185-d6b9-1f34ec615851}">
+        <p14:section name="結語" id="{43efb41c-67de-4b91-b4b9-7eaa3ec66620}">
           <p14:sldIdLst>
             <p14:sldId id="278"/>
             <p14:sldId id="279"/>
@@ -2630,7 +2630,7 @@
           <a:p>
             <a:r>
               <a:rPr lang="en-US" dirty="0"/>
-              <a:t>前兩輪是我們用測試帳號替使用者走一遍；第三輪是使用者本人打開網站，指出看了會困惑的地方。共同點是同一件事講太多遍、用不到的東西一直掛著。我們照他的話收乾淨：帳本只剩一份清單、收入支出各自點進去、首頁寫家庭的名字、主題自己一頁、搜尋和帳本切換只在用得到的頁面出現。</a:t>
+              <a:t>前兩輪是我們用測試帳號替使用者走一遍；第三輪是使用者本人打開網站，指出看了會困惑的地方。共同點是同一件事講太多遍、用不到的東西一直掛著。我們照他的話收乾淨：帳本只剩一份清單、收入支出各自點進去、首頁寫家庭的名字、主題自己一頁、搜尋和帳本切換只在用得到的頁面出現。另外補上信箱驗證的把關：沒點驗證信的帳號不能登入並給提示；平台管理頁把這類帳號標成「待驗證」，驗證連結過期就從後台消失，跟能不能登入同步。</a:t>
             </a:r>
             <a:endParaRPr lang="en-US" dirty="0"/>
           </a:p>
@@ -17750,7 +17750,7 @@
         </p:nvSpPr>
         <p:spPr>
           <a:xfrm>
-            <a:off x="7315200" y="1371600"/>
+            <a:off x="7315200" y="1325880"/>
             <a:ext cx="502920" cy="502920"/>
           </a:xfrm>
           <a:prstGeom prst="ellipse">
@@ -17783,7 +17783,7 @@
         </p:blipFill>
         <p:spPr>
           <a:xfrm>
-            <a:off x="7445959" y="1502359"/>
+            <a:off x="7445959" y="1456639"/>
             <a:ext cx="241402" cy="241402"/>
           </a:xfrm>
           <a:prstGeom prst="rect">
@@ -17799,7 +17799,7 @@
         </p:nvSpPr>
         <p:spPr>
           <a:xfrm>
-            <a:off x="7955280" y="1335024"/>
+            <a:off x="7955280" y="1289304"/>
             <a:ext cx="3703320" cy="365760"/>
           </a:xfrm>
           <a:prstGeom prst="rect">
@@ -17835,7 +17835,7 @@
         </p:nvSpPr>
         <p:spPr>
           <a:xfrm>
-            <a:off x="7955280" y="1700784"/>
+            <a:off x="7955280" y="1655064"/>
             <a:ext cx="3703320" cy="457200"/>
           </a:xfrm>
           <a:prstGeom prst="rect">
@@ -17871,7 +17871,7 @@
         </p:nvSpPr>
         <p:spPr>
           <a:xfrm>
-            <a:off x="7315200" y="2304288"/>
+            <a:off x="7315200" y="2148840"/>
             <a:ext cx="502920" cy="502920"/>
           </a:xfrm>
           <a:prstGeom prst="ellipse">
@@ -17904,7 +17904,7 @@
         </p:blipFill>
         <p:spPr>
           <a:xfrm>
-            <a:off x="7445959" y="2435047"/>
+            <a:off x="7445959" y="2279599"/>
             <a:ext cx="241402" cy="241402"/>
           </a:xfrm>
           <a:prstGeom prst="rect">
@@ -17920,7 +17920,7 @@
         </p:nvSpPr>
         <p:spPr>
           <a:xfrm>
-            <a:off x="7955280" y="2267712"/>
+            <a:off x="7955280" y="2112264"/>
             <a:ext cx="3703320" cy="365760"/>
           </a:xfrm>
           <a:prstGeom prst="rect">
@@ -17956,7 +17956,7 @@
         </p:nvSpPr>
         <p:spPr>
           <a:xfrm>
-            <a:off x="7955280" y="2633472"/>
+            <a:off x="7955280" y="2478024"/>
             <a:ext cx="3703320" cy="457200"/>
           </a:xfrm>
           <a:prstGeom prst="rect">
@@ -17992,7 +17992,7 @@
         </p:nvSpPr>
         <p:spPr>
           <a:xfrm>
-            <a:off x="7315200" y="3236976"/>
+            <a:off x="7315200" y="2971800"/>
             <a:ext cx="502920" cy="502920"/>
           </a:xfrm>
           <a:prstGeom prst="ellipse">
@@ -18025,7 +18025,7 @@
         </p:blipFill>
         <p:spPr>
           <a:xfrm>
-            <a:off x="7445959" y="3367735"/>
+            <a:off x="7445959" y="3102559"/>
             <a:ext cx="241402" cy="241402"/>
           </a:xfrm>
           <a:prstGeom prst="rect">
@@ -18041,7 +18041,7 @@
         </p:nvSpPr>
         <p:spPr>
           <a:xfrm>
-            <a:off x="7955280" y="3200400"/>
+            <a:off x="7955280" y="2935224"/>
             <a:ext cx="3703320" cy="365760"/>
           </a:xfrm>
           <a:prstGeom prst="rect">
@@ -18077,7 +18077,7 @@
         </p:nvSpPr>
         <p:spPr>
           <a:xfrm>
-            <a:off x="7955280" y="3566160"/>
+            <a:off x="7955280" y="3300984"/>
             <a:ext cx="3703320" cy="457200"/>
           </a:xfrm>
           <a:prstGeom prst="rect">
@@ -18113,7 +18113,7 @@
         </p:nvSpPr>
         <p:spPr>
           <a:xfrm>
-            <a:off x="7315200" y="4169664"/>
+            <a:off x="7315200" y="3794760"/>
             <a:ext cx="502920" cy="502920"/>
           </a:xfrm>
           <a:prstGeom prst="ellipse">
@@ -18146,7 +18146,7 @@
         </p:blipFill>
         <p:spPr>
           <a:xfrm>
-            <a:off x="7445959" y="4300423"/>
+            <a:off x="7445959" y="3925519"/>
             <a:ext cx="241402" cy="241402"/>
           </a:xfrm>
           <a:prstGeom prst="rect">
@@ -18162,7 +18162,7 @@
         </p:nvSpPr>
         <p:spPr>
           <a:xfrm>
-            <a:off x="7955280" y="4133088"/>
+            <a:off x="7955280" y="3758184"/>
             <a:ext cx="3703320" cy="365760"/>
           </a:xfrm>
           <a:prstGeom prst="rect">
@@ -18198,7 +18198,7 @@
         </p:nvSpPr>
         <p:spPr>
           <a:xfrm>
-            <a:off x="7955280" y="4498848"/>
+            <a:off x="7955280" y="4123944"/>
             <a:ext cx="3703320" cy="457200"/>
           </a:xfrm>
           <a:prstGeom prst="rect">
@@ -18234,7 +18234,7 @@
         </p:nvSpPr>
         <p:spPr>
           <a:xfrm>
-            <a:off x="7315200" y="5102352"/>
+            <a:off x="7315200" y="4617720"/>
             <a:ext cx="502920" cy="502920"/>
           </a:xfrm>
           <a:prstGeom prst="ellipse">
@@ -18267,7 +18267,7 @@
         </p:blipFill>
         <p:spPr>
           <a:xfrm>
-            <a:off x="7445959" y="5233111"/>
+            <a:off x="7445959" y="4748479"/>
             <a:ext cx="241402" cy="241402"/>
           </a:xfrm>
           <a:prstGeom prst="rect">
@@ -18283,7 +18283,7 @@
         </p:nvSpPr>
         <p:spPr>
           <a:xfrm>
-            <a:off x="7955280" y="5065776"/>
+            <a:off x="7955280" y="4581144"/>
             <a:ext cx="3703320" cy="365760"/>
           </a:xfrm>
           <a:prstGeom prst="rect">
@@ -18319,7 +18319,7 @@
         </p:nvSpPr>
         <p:spPr>
           <a:xfrm>
-            <a:off x="7955280" y="5431536"/>
+            <a:off x="7955280" y="4946904"/>
             <a:ext cx="3703320" cy="457200"/>
           </a:xfrm>
           <a:prstGeom prst="rect">
@@ -18342,6 +18342,127 @@
                 </a:solidFill>
               </a:rPr>
               <a:t>搜尋、帳本切換只在用得到的頁面出現</a:t>
+            </a:r>
+            <a:endParaRPr lang="en-US" sz="1250" dirty="0"/>
+          </a:p>
+        </p:txBody>
+      </p:sp>
+      <p:sp>
+        <p:nvSpPr>
+          <p:cNvPr id="25" name="third-c5-circle"/>
+          <p:cNvSpPr/>
+          <p:nvPr/>
+        </p:nvSpPr>
+        <p:spPr>
+          <a:xfrm>
+            <a:off x="7315200" y="5440680"/>
+            <a:ext cx="502920" cy="502920"/>
+          </a:xfrm>
+          <a:prstGeom prst="ellipse">
+            <a:avLst/>
+          </a:prstGeom>
+          <a:solidFill>
+            <a:schemeClr val="accent1"/>
+          </a:solidFill>
+          <a:ln w="12700">
+            <a:solidFill>
+              <a:schemeClr val="accent1"/>
+            </a:solidFill>
+            <a:prstDash val="solid"/>
+          </a:ln>
+        </p:spPr>
+      </p:sp>
+      <p:pic>
+        <p:nvPicPr>
+          <p:cNvPr id="26" name="third-c5-icon" descr="preencoded.png">    </p:cNvPr>
+          <p:cNvPicPr>
+            <a:picLocks noChangeAspect="1"/>
+          </p:cNvPicPr>
+          <p:nvPr/>
+        </p:nvPicPr>
+        <p:blipFill>
+          <a:blip r:embed="rId7"/>
+          <a:stretch>
+            <a:fillRect/>
+          </a:stretch>
+        </p:blipFill>
+        <p:spPr>
+          <a:xfrm>
+            <a:off x="7445959" y="5571439"/>
+            <a:ext cx="241402" cy="241402"/>
+          </a:xfrm>
+          <a:prstGeom prst="rect">
+            <a:avLst/>
+          </a:prstGeom>
+        </p:spPr>
+      </p:pic>
+      <p:sp>
+        <p:nvSpPr>
+          <p:cNvPr id="27" name="Text 18"/>
+          <p:cNvSpPr txBox="1"/>
+          <p:nvPr/>
+        </p:nvSpPr>
+        <p:spPr>
+          <a:xfrm>
+            <a:off x="7955280" y="5404104"/>
+            <a:ext cx="3703320" cy="365760"/>
+          </a:xfrm>
+          <a:prstGeom prst="rect">
+            <a:avLst/>
+          </a:prstGeom>
+          <a:noFill/>
+          <a:ln/>
+        </p:spPr>
+        <p:txBody>
+          <a:bodyPr wrap="square" lIns="0" tIns="0" rIns="0" bIns="0" rtlCol="0" anchor="t"/>
+          <a:lstStyle/>
+          <a:p>
+            <a:pPr indent="0" marL="0">
+              <a:buNone/>
+            </a:pPr>
+            <a:r>
+              <a:rPr lang="en-US" sz="1600" b="1" dirty="0">
+                <a:solidFill>
+                  <a:schemeClr val="tx2"/>
+                </a:solidFill>
+              </a:rPr>
+              <a:t>沒驗證信箱不能登入</a:t>
+            </a:r>
+            <a:endParaRPr lang="en-US" sz="1600" dirty="0"/>
+          </a:p>
+        </p:txBody>
+      </p:sp>
+      <p:sp>
+        <p:nvSpPr>
+          <p:cNvPr id="28" name="Text 19"/>
+          <p:cNvSpPr txBox="1"/>
+          <p:nvPr/>
+        </p:nvSpPr>
+        <p:spPr>
+          <a:xfrm>
+            <a:off x="7955280" y="5769864"/>
+            <a:ext cx="3703320" cy="457200"/>
+          </a:xfrm>
+          <a:prstGeom prst="rect">
+            <a:avLst/>
+          </a:prstGeom>
+          <a:noFill/>
+          <a:ln/>
+        </p:spPr>
+        <p:txBody>
+          <a:bodyPr wrap="square" lIns="0" tIns="0" rIns="0" bIns="0" rtlCol="0" anchor="t"/>
+          <a:lstStyle/>
+          <a:p>
+            <a:pPr indent="0" marL="0">
+              <a:buNone/>
+            </a:pPr>
+            <a:r>
+              <a:rPr lang="en-US" sz="1250" dirty="0">
+                <a:solidFill>
+                  <a:schemeClr val="accent5"/>
+                </a:solidFill>
+              </a:rPr>
+              <a:t>登入給提示；管理頁標「待驗證」，連結過期就從後台消失</a:t>
             </a:r>
             <a:endParaRPr lang="en-US" sz="1250" dirty="0"/>
           </a:p>
